--- a/learning/P01_zephyr_make_project/slides/P008_west零基础与Zephyr构建_Windows.pptx
+++ b/learning/P01_zephyr_make_project/slides/P008_west零基础与Zephyr构建_Windows.pptx
@@ -23383,7 +23383,29 @@
                 <a:ea typeface="Microsoft YaHei"/>
                 <a:cs typeface="Microsoft YaHei"/>
               </a:rPr>
-              <a:t>P007 用过 CMake，本册再展开 west build 的调用。</a:t>
+              <a:t>P007 用过 CMake，本册再展开 </a:t>
+            </a:r>
+            <a:r>
+              <a:rPr sz="1950" b="0">
+                <a:solidFill>
+                  <a:srgbClr val="A02B93"/>
+                </a:solidFill>
+                <a:latin typeface="Microsoft YaHei"/>
+                <a:ea typeface="Microsoft YaHei"/>
+                <a:cs typeface="Microsoft YaHei"/>
+              </a:rPr>
+              <a:t>west</a:t>
+            </a:r>
+            <a:r>
+              <a:rPr sz="1950" b="0">
+                <a:solidFill>
+                  <a:srgbClr val="29263B"/>
+                </a:solidFill>
+                <a:latin typeface="Microsoft YaHei"/>
+                <a:ea typeface="Microsoft YaHei"/>
+                <a:cs typeface="Microsoft YaHei"/>
+              </a:rPr>
+              <a:t> build 的调用。</a:t>
             </a:r>
           </a:p>
           <a:p>
@@ -23413,7 +23435,51 @@
                 <a:ea typeface="Microsoft YaHei"/>
                 <a:cs typeface="Microsoft YaHei"/>
               </a:rPr>
-              <a:t>官方 west.yml 保留原样；独立清单实验在 learning/west。</a:t>
+              <a:t>官方 </a:t>
+            </a:r>
+            <a:r>
+              <a:rPr sz="1950" b="0">
+                <a:solidFill>
+                  <a:srgbClr val="0070C0"/>
+                </a:solidFill>
+                <a:latin typeface="Microsoft YaHei"/>
+                <a:ea typeface="Microsoft YaHei"/>
+                <a:cs typeface="Microsoft YaHei"/>
+              </a:rPr>
+              <a:t>west.yml</a:t>
+            </a:r>
+            <a:r>
+              <a:rPr sz="1950" b="0">
+                <a:solidFill>
+                  <a:srgbClr val="29263B"/>
+                </a:solidFill>
+                <a:latin typeface="Microsoft YaHei"/>
+                <a:ea typeface="Microsoft YaHei"/>
+                <a:cs typeface="Microsoft YaHei"/>
+              </a:rPr>
+              <a:t> 保留原样；独立清单实验在 </a:t>
+            </a:r>
+            <a:r>
+              <a:rPr sz="1950" b="0">
+                <a:solidFill>
+                  <a:srgbClr val="0070C0"/>
+                </a:solidFill>
+                <a:latin typeface="Microsoft YaHei"/>
+                <a:ea typeface="Microsoft YaHei"/>
+                <a:cs typeface="Microsoft YaHei"/>
+              </a:rPr>
+              <a:t>learning/west</a:t>
+            </a:r>
+            <a:r>
+              <a:rPr sz="1950" b="0">
+                <a:solidFill>
+                  <a:srgbClr val="29263B"/>
+                </a:solidFill>
+                <a:latin typeface="Microsoft YaHei"/>
+                <a:ea typeface="Microsoft YaHei"/>
+                <a:cs typeface="Microsoft YaHei"/>
+              </a:rPr>
+              <a:t>。</a:t>
             </a:r>
           </a:p>
         </p:txBody>
@@ -23481,13 +23547,24 @@
             <a:r>
               <a:rPr sz="1725">
                 <a:solidFill>
-                  <a:srgbClr val="29263B"/>
-                </a:solidFill>
-                <a:latin typeface="Microsoft YaHei"/>
-                <a:ea typeface="Microsoft YaHei"/>
-                <a:cs typeface="Microsoft YaHei"/>
-              </a:rPr>
-              <a:t>west 核心</a:t>
+                  <a:srgbClr val="A02B93"/>
+                </a:solidFill>
+                <a:latin typeface="Microsoft YaHei"/>
+                <a:ea typeface="Microsoft YaHei"/>
+                <a:cs typeface="Microsoft YaHei"/>
+              </a:rPr>
+              <a:t>west</a:t>
+            </a:r>
+            <a:r>
+              <a:rPr sz="1725">
+                <a:solidFill>
+                  <a:srgbClr val="29263B"/>
+                </a:solidFill>
+                <a:latin typeface="Microsoft YaHei"/>
+                <a:ea typeface="Microsoft YaHei"/>
+                <a:cs typeface="Microsoft YaHei"/>
+              </a:rPr>
+              <a:t> 核心</a:t>
             </a:r>
           </a:p>
         </p:txBody>
@@ -24302,7 +24379,16 @@
               <a:rPr u="sng">
                 <a:hlinkClick r:id="R65ea137ea1704ffe"/>
               </a:rPr>
-              <a:t>依据：doc/develop/west/basics.rst</a:t>
+              <a:t>依据：</a:t>
+            </a:r>
+            <a:r>
+              <a:rPr u="sng">
+                <a:solidFill>
+                  <a:srgbClr val="0070C0"/>
+                </a:solidFill>
+                <a:hlinkClick r:id="R65ea137ea1704ffe"/>
+              </a:rPr>
+              <a:t>doc/develop/west/basics.rst</a:t>
             </a:r>
           </a:p>
         </p:txBody>
@@ -24450,6 +24536,107 @@
               <a:ea typeface="Microsoft YaHei"/>
               <a:cs typeface="Microsoft YaHei"/>
             </a:endParaRPr>
+          </a:p>
+        </p:txBody>
+      </p:sp>
+      <p:sp>
+        <p:nvSpPr>
+          <p:cNvPr id="19" name="Semantic color legend">
+            <a:extLst>
+              <a:ext uri="{FF2B5EF4-FFF2-40B4-BE49-F238E27FC236}">
+                <a16:creationId xmlns:a16="http://schemas.microsoft.com/office/drawing/2014/main" id="{39154CEE-9E0E-4815-8A42-342F49989EDD}"/>
+              </a:ext>
+            </a:extLst>
+          </p:cNvPr>
+          <p:cNvSpPr>
+            <a:spLocks noGrp="1"/>
+          </p:cNvSpPr>
+          <p:nvPr/>
+        </p:nvSpPr>
+        <p:spPr>
+          <a:xfrm>
+            <a:off x="609600" y="3333750"/>
+            <a:ext cx="10972800" cy="342900"/>
+          </a:xfrm>
+          <a:prstGeom prst="rect">
+            <a:avLst/>
+          </a:prstGeom>
+          <a:noFill/>
+          <a:ln w="0">
+            <a:noFill/>
+          </a:ln>
+        </p:spPr>
+        <p:txBody>
+          <a:bodyPr>
+            <a:noAutofit/>
+          </a:bodyPr>
+          <a:lstStyle>
+            <a:defPPr>
+              <a:defRPr sz="1575">
+                <a:solidFill>
+                  <a:srgbClr val="646173"/>
+                </a:solidFill>
+                <a:latin typeface="Microsoft YaHei"/>
+                <a:ea typeface="Microsoft YaHei"/>
+                <a:cs typeface="Microsoft YaHei"/>
+              </a:defRPr>
+            </a:defPPr>
+          </a:lstStyle>
+          <a:p>
+            <a:pPr>
+              <a:defRPr sz="1575">
+                <a:solidFill>
+                  <a:srgbClr val="646173"/>
+                </a:solidFill>
+                <a:latin typeface="Microsoft YaHei"/>
+                <a:ea typeface="Microsoft YaHei"/>
+                <a:cs typeface="Microsoft YaHei"/>
+              </a:defRPr>
+            </a:pPr>
+            <a:r>
+              <a:t>阅读标色： </a:t>
+            </a:r>
+            <a:r>
+              <a:rPr>
+                <a:solidFill>
+                  <a:srgbClr val="B84E00"/>
+                </a:solidFill>
+              </a:rPr>
+              <a:t>变量 / 参数</a:t>
+            </a:r>
+            <a:r>
+              <a:t>     </a:t>
+            </a:r>
+            <a:r>
+              <a:rPr>
+                <a:solidFill>
+                  <a:srgbClr val="0070C0"/>
+                </a:solidFill>
+              </a:rPr>
+              <a:t>文件 / 路径</a:t>
+            </a:r>
+            <a:r>
+              <a:t>     </a:t>
+            </a:r>
+            <a:r>
+              <a:rPr>
+                <a:solidFill>
+                  <a:srgbClr val="087B3D"/>
+                </a:solidFill>
+              </a:rPr>
+              <a:t>接口函数</a:t>
+            </a:r>
+            <a:r>
+              <a:t>     </a:t>
+            </a:r>
+            <a:r>
+              <a:rPr>
+                <a:solidFill>
+                  <a:srgbClr val="A02B93"/>
+                </a:solidFill>
+              </a:rPr>
+              <a:t>终端命令</a:t>
+            </a:r>
           </a:p>
         </p:txBody>
       </p:sp>
@@ -24735,13 +24922,24 @@
             <a:r>
               <a:rPr sz="1950" b="0">
                 <a:solidFill>
-                  <a:srgbClr val="29263B"/>
-                </a:solidFill>
-                <a:latin typeface="Microsoft YaHei"/>
-                <a:ea typeface="Microsoft YaHei"/>
-                <a:cs typeface="Microsoft YaHei"/>
-              </a:rPr>
-              <a:t>west update cmsis_6 只请求该项目，成功后检查入口与版本。</a:t>
+                  <a:srgbClr val="A02B93"/>
+                </a:solidFill>
+                <a:latin typeface="Microsoft YaHei"/>
+                <a:ea typeface="Microsoft YaHei"/>
+                <a:cs typeface="Microsoft YaHei"/>
+              </a:rPr>
+              <a:t>west</a:t>
+            </a:r>
+            <a:r>
+              <a:rPr sz="1950" b="0">
+                <a:solidFill>
+                  <a:srgbClr val="29263B"/>
+                </a:solidFill>
+                <a:latin typeface="Microsoft YaHei"/>
+                <a:ea typeface="Microsoft YaHei"/>
+                <a:cs typeface="Microsoft YaHei"/>
+              </a:rPr>
+              <a:t> update cmsis_6 只请求该项目，成功后检查入口与版本。</a:t>
             </a:r>
           </a:p>
           <a:p>
@@ -24871,7 +25069,16 @@
               <a:rPr u="sng">
                 <a:hlinkClick r:id="R377d2d9040c240c1"/>
               </a:rPr>
-              <a:t>依据：doc/develop/west/built-in.rst</a:t>
+              <a:t>依据：</a:t>
+            </a:r>
+            <a:r>
+              <a:rPr u="sng">
+                <a:solidFill>
+                  <a:srgbClr val="0070C0"/>
+                </a:solidFill>
+                <a:hlinkClick r:id="R377d2d9040c240c1"/>
+              </a:rPr>
+              <a:t>doc/develop/west/built-in.rst</a:t>
             </a:r>
           </a:p>
         </p:txBody>
@@ -25350,7 +25557,51 @@
                 <a:ea typeface="Microsoft YaHei"/>
                 <a:cs typeface="Microsoft YaHei"/>
               </a:rPr>
-              <a:t>检查 zephyr/module.yml 与 CMSIS/Core/Include/core_cm4.h。</a:t>
+              <a:t>检查 </a:t>
+            </a:r>
+            <a:r>
+              <a:rPr sz="1950" b="0">
+                <a:solidFill>
+                  <a:srgbClr val="0070C0"/>
+                </a:solidFill>
+                <a:latin typeface="Microsoft YaHei"/>
+                <a:ea typeface="Microsoft YaHei"/>
+                <a:cs typeface="Microsoft YaHei"/>
+              </a:rPr>
+              <a:t>zephyr/module.yml</a:t>
+            </a:r>
+            <a:r>
+              <a:rPr sz="1950" b="0">
+                <a:solidFill>
+                  <a:srgbClr val="29263B"/>
+                </a:solidFill>
+                <a:latin typeface="Microsoft YaHei"/>
+                <a:ea typeface="Microsoft YaHei"/>
+                <a:cs typeface="Microsoft YaHei"/>
+              </a:rPr>
+              <a:t> 与 </a:t>
+            </a:r>
+            <a:r>
+              <a:rPr sz="1950" b="0">
+                <a:solidFill>
+                  <a:srgbClr val="0070C0"/>
+                </a:solidFill>
+                <a:latin typeface="Microsoft YaHei"/>
+                <a:ea typeface="Microsoft YaHei"/>
+                <a:cs typeface="Microsoft YaHei"/>
+              </a:rPr>
+              <a:t>CMSIS/Core/Include/core_cm4.h</a:t>
+            </a:r>
+            <a:r>
+              <a:rPr sz="1950" b="0">
+                <a:solidFill>
+                  <a:srgbClr val="29263B"/>
+                </a:solidFill>
+                <a:latin typeface="Microsoft YaHei"/>
+                <a:ea typeface="Microsoft YaHei"/>
+                <a:cs typeface="Microsoft YaHei"/>
+              </a:rPr>
+              <a:t>。</a:t>
             </a:r>
           </a:p>
           <a:p>
@@ -25510,7 +25761,16 @@
               <a:rPr u="sng">
                 <a:hlinkClick r:id="Rb41859c392824241"/>
               </a:rPr>
-              <a:t>依据：doc/develop/west/built-in.rst</a:t>
+              <a:t>依据：</a:t>
+            </a:r>
+            <a:r>
+              <a:rPr u="sng">
+                <a:solidFill>
+                  <a:srgbClr val="0070C0"/>
+                </a:solidFill>
+                <a:hlinkClick r:id="Rb41859c392824241"/>
+              </a:rPr>
+              <a:t>doc/develop/west/built-in.rst</a:t>
             </a:r>
           </a:p>
         </p:txBody>
@@ -25919,7 +26179,29 @@
                 <a:ea typeface="Microsoft YaHei"/>
                 <a:cs typeface="Microsoft YaHei"/>
               </a:rPr>
-              <a:t>官方 west.yml 的 self.west-commands 指向扩展声明文件。</a:t>
+              <a:t>官方 </a:t>
+            </a:r>
+            <a:r>
+              <a:rPr sz="1950" b="0">
+                <a:solidFill>
+                  <a:srgbClr val="0070C0"/>
+                </a:solidFill>
+                <a:latin typeface="Microsoft YaHei"/>
+                <a:ea typeface="Microsoft YaHei"/>
+                <a:cs typeface="Microsoft YaHei"/>
+              </a:rPr>
+              <a:t>west.yml</a:t>
+            </a:r>
+            <a:r>
+              <a:rPr sz="1950" b="0">
+                <a:solidFill>
+                  <a:srgbClr val="29263B"/>
+                </a:solidFill>
+                <a:latin typeface="Microsoft YaHei"/>
+                <a:ea typeface="Microsoft YaHei"/>
+                <a:cs typeface="Microsoft YaHei"/>
+              </a:rPr>
+              <a:t> 的 self.west-commands 指向扩展声明文件。</a:t>
             </a:r>
           </a:p>
           <a:p>
@@ -25973,13 +26255,24 @@
             <a:r>
               <a:rPr sz="1950" b="0">
                 <a:solidFill>
-                  <a:srgbClr val="29263B"/>
-                </a:solidFill>
-                <a:latin typeface="Microsoft YaHei"/>
-                <a:ea typeface="Microsoft YaHei"/>
-                <a:cs typeface="Microsoft YaHei"/>
-              </a:rPr>
-              <a:t>west 核心读取声明，再加载命令实现；不是 SDK 安装出的命令。</a:t>
+                  <a:srgbClr val="A02B93"/>
+                </a:solidFill>
+                <a:latin typeface="Microsoft YaHei"/>
+                <a:ea typeface="Microsoft YaHei"/>
+                <a:cs typeface="Microsoft YaHei"/>
+              </a:rPr>
+              <a:t>west</a:t>
+            </a:r>
+            <a:r>
+              <a:rPr sz="1950" b="0">
+                <a:solidFill>
+                  <a:srgbClr val="29263B"/>
+                </a:solidFill>
+                <a:latin typeface="Microsoft YaHei"/>
+                <a:ea typeface="Microsoft YaHei"/>
+                <a:cs typeface="Microsoft YaHei"/>
+              </a:rPr>
+              <a:t> 核心读取声明，再加载命令实现；不是 SDK 安装出的命令。</a:t>
             </a:r>
           </a:p>
         </p:txBody>
@@ -26047,7 +26340,7 @@
             <a:r>
               <a:rPr sz="1725">
                 <a:solidFill>
-                  <a:srgbClr val="29263B"/>
+                  <a:srgbClr val="0070C0"/>
                 </a:solidFill>
                 <a:latin typeface="Microsoft YaHei"/>
                 <a:ea typeface="Microsoft YaHei"/>
@@ -26196,7 +26489,7 @@
             <a:r>
               <a:rPr sz="1725">
                 <a:solidFill>
-                  <a:srgbClr val="29263B"/>
+                  <a:srgbClr val="0070C0"/>
                 </a:solidFill>
                 <a:latin typeface="Microsoft YaHei"/>
                 <a:ea typeface="Microsoft YaHei"/>
@@ -26345,13 +26638,24 @@
             <a:r>
               <a:rPr sz="1725">
                 <a:solidFill>
-                  <a:srgbClr val="29263B"/>
-                </a:solidFill>
-                <a:latin typeface="Microsoft YaHei"/>
-                <a:ea typeface="Microsoft YaHei"/>
-                <a:cs typeface="Microsoft YaHei"/>
-              </a:rPr>
-              <a:t>build.py / Build</a:t>
+                  <a:srgbClr val="0070C0"/>
+                </a:solidFill>
+                <a:latin typeface="Microsoft YaHei"/>
+                <a:ea typeface="Microsoft YaHei"/>
+                <a:cs typeface="Microsoft YaHei"/>
+              </a:rPr>
+              <a:t>build.py</a:t>
+            </a:r>
+            <a:r>
+              <a:rPr sz="1725">
+                <a:solidFill>
+                  <a:srgbClr val="29263B"/>
+                </a:solidFill>
+                <a:latin typeface="Microsoft YaHei"/>
+                <a:ea typeface="Microsoft YaHei"/>
+                <a:cs typeface="Microsoft YaHei"/>
+              </a:rPr>
+              <a:t> / Build</a:t>
             </a:r>
           </a:p>
         </p:txBody>
@@ -26494,13 +26798,24 @@
             <a:r>
               <a:rPr sz="1725">
                 <a:solidFill>
-                  <a:srgbClr val="29263B"/>
-                </a:solidFill>
-                <a:latin typeface="Microsoft YaHei"/>
-                <a:ea typeface="Microsoft YaHei"/>
-                <a:cs typeface="Microsoft YaHei"/>
-              </a:rPr>
-              <a:t>west build</a:t>
+                  <a:srgbClr val="A02B93"/>
+                </a:solidFill>
+                <a:latin typeface="Microsoft YaHei"/>
+                <a:ea typeface="Microsoft YaHei"/>
+                <a:cs typeface="Microsoft YaHei"/>
+              </a:rPr>
+              <a:t>west</a:t>
+            </a:r>
+            <a:r>
+              <a:rPr sz="1725">
+                <a:solidFill>
+                  <a:srgbClr val="29263B"/>
+                </a:solidFill>
+                <a:latin typeface="Microsoft YaHei"/>
+                <a:ea typeface="Microsoft YaHei"/>
+                <a:cs typeface="Microsoft YaHei"/>
+              </a:rPr>
+              <a:t> build</a:t>
             </a:r>
           </a:p>
         </p:txBody>
@@ -26570,7 +26885,46 @@
               <a:rPr u="sng">
                 <a:hlinkClick r:id="R7807fd4918ee4807"/>
               </a:rPr>
-              <a:t>依据：west.yml → scripts/west-commands.yml → scripts/west_commands/build.py</a:t>
+              <a:t>依据：</a:t>
+            </a:r>
+            <a:r>
+              <a:rPr u="sng">
+                <a:solidFill>
+                  <a:srgbClr val="0070C0"/>
+                </a:solidFill>
+                <a:hlinkClick r:id="R7807fd4918ee4807"/>
+              </a:rPr>
+              <a:t>west.yml</a:t>
+            </a:r>
+            <a:r>
+              <a:rPr u="sng">
+                <a:hlinkClick r:id="R7807fd4918ee4807"/>
+              </a:rPr>
+              <a:t> → </a:t>
+            </a:r>
+            <a:r>
+              <a:rPr u="sng">
+                <a:solidFill>
+                  <a:srgbClr val="0070C0"/>
+                </a:solidFill>
+                <a:hlinkClick r:id="R7807fd4918ee4807"/>
+              </a:rPr>
+              <a:t>scripts/west-commands.yml</a:t>
+            </a:r>
+            <a:r>
+              <a:rPr u="sng">
+                <a:hlinkClick r:id="R7807fd4918ee4807"/>
+              </a:rPr>
+              <a:t> → </a:t>
+            </a:r>
+            <a:r>
+              <a:rPr u="sng">
+                <a:solidFill>
+                  <a:srgbClr val="0070C0"/>
+                </a:solidFill>
+                <a:hlinkClick r:id="R7807fd4918ee4807"/>
+              </a:rPr>
+              <a:t>scripts/west_commands/build.py</a:t>
             </a:r>
           </a:p>
         </p:txBody>
@@ -26979,35 +27333,19 @@
                 <a:ea typeface="Consolas"/>
                 <a:cs typeface="Consolas"/>
               </a:rPr>
-              <a:t>- file: scripts</a:t>
-            </a:r>
-            <a:r>
-              <a:rPr>
-                <a:solidFill>
-                  <a:srgbClr val="0070C0"/>
-                </a:solidFill>
-              </a:rPr>
-              <a:t>/west_commands/build.py</a:t>
-            </a:r>
-          </a:p>
-          <a:p>
-            <a:pPr>
-              <a:lnSpc>
-                <a:spcPct val="120000"/>
-              </a:lnSpc>
-              <a:spcAft>
-                <a:spcPts val="0"/>
-              </a:spcAft>
-              <a:buNone/>
-              <a:defRPr sz="1725" b="0">
-                <a:solidFill>
-                  <a:srgbClr val="29263B"/>
+              <a:t>- </a:t>
+            </a:r>
+            <a:r>
+              <a:rPr sz="1725" b="0">
+                <a:solidFill>
+                  <a:srgbClr val="B84E00"/>
                 </a:solidFill>
                 <a:latin typeface="Consolas"/>
                 <a:ea typeface="Consolas"/>
                 <a:cs typeface="Consolas"/>
-              </a:defRPr>
-            </a:pPr>
+              </a:rPr>
+              <a:t>file</a:t>
+            </a:r>
             <a:r>
               <a:rPr sz="1725" b="0">
                 <a:solidFill>
@@ -27017,97 +27355,234 @@
                 <a:ea typeface="Consolas"/>
                 <a:cs typeface="Consolas"/>
               </a:rPr>
-              <a:t>  commands:</a:t>
-            </a:r>
-          </a:p>
-          <a:p>
-            <a:pPr>
-              <a:lnSpc>
-                <a:spcPct val="120000"/>
-              </a:lnSpc>
-              <a:spcAft>
-                <a:spcPts val="0"/>
-              </a:spcAft>
-              <a:buNone/>
-              <a:defRPr sz="1725" b="0">
-                <a:solidFill>
-                  <a:srgbClr val="29263B"/>
+              <a:t>: </a:t>
+            </a:r>
+            <a:r>
+              <a:rPr sz="1725" b="0">
+                <a:solidFill>
+                  <a:srgbClr val="0070C0"/>
                 </a:solidFill>
                 <a:latin typeface="Consolas"/>
                 <a:ea typeface="Consolas"/>
                 <a:cs typeface="Consolas"/>
-              </a:defRPr>
-            </a:pPr>
-            <a:r>
-              <a:rPr sz="1725" b="0">
+              </a:rPr>
+              <a:t>scripts</a:t>
+            </a:r>
+            <a:r>
+              <a:rPr>
+                <a:solidFill>
+                  <a:srgbClr val="0070C0"/>
+                </a:solidFill>
+              </a:rPr>
+              <a:t>/west_commands/build.py</a:t>
+            </a:r>
+          </a:p>
+          <a:p>
+            <a:pPr>
+              <a:lnSpc>
+                <a:spcPct val="120000"/>
+              </a:lnSpc>
+              <a:spcAft>
+                <a:spcPts val="0"/>
+              </a:spcAft>
+              <a:buNone/>
+              <a:defRPr sz="1725" b="0">
                 <a:solidFill>
                   <a:srgbClr val="29263B"/>
                 </a:solidFill>
                 <a:latin typeface="Consolas"/>
                 <a:ea typeface="Consolas"/>
                 <a:cs typeface="Consolas"/>
-              </a:rPr>
-              <a:t>    - name: build</a:t>
-            </a:r>
-          </a:p>
-          <a:p>
-            <a:pPr>
-              <a:lnSpc>
-                <a:spcPct val="120000"/>
-              </a:lnSpc>
-              <a:spcAft>
-                <a:spcPts val="0"/>
-              </a:spcAft>
-              <a:buNone/>
-              <a:defRPr sz="1725" b="0">
+              </a:defRPr>
+            </a:pPr>
+            <a:r>
+              <a:rPr sz="1725" b="0">
                 <a:solidFill>
                   <a:srgbClr val="29263B"/>
                 </a:solidFill>
                 <a:latin typeface="Consolas"/>
                 <a:ea typeface="Consolas"/>
                 <a:cs typeface="Consolas"/>
-              </a:defRPr>
-            </a:pPr>
+              </a:rPr>
+              <a:t>  </a:t>
+            </a:r>
             <a:r>
               <a:rPr sz="1725" b="0">
                 <a:solidFill>
-                  <a:srgbClr val="29263B"/>
+                  <a:srgbClr val="B84E00"/>
                 </a:solidFill>
                 <a:latin typeface="Consolas"/>
                 <a:ea typeface="Consolas"/>
                 <a:cs typeface="Consolas"/>
               </a:rPr>
-              <a:t>      class: Build</a:t>
-            </a:r>
-          </a:p>
-          <a:p>
-            <a:pPr>
-              <a:lnSpc>
-                <a:spcPct val="120000"/>
-              </a:lnSpc>
-              <a:spcAft>
-                <a:spcPts val="0"/>
-              </a:spcAft>
-              <a:buNone/>
-              <a:defRPr sz="1725" b="0">
+              <a:t>commands</a:t>
+            </a:r>
+            <a:r>
+              <a:rPr sz="1725" b="0">
                 <a:solidFill>
                   <a:srgbClr val="29263B"/>
                 </a:solidFill>
                 <a:latin typeface="Consolas"/>
                 <a:ea typeface="Consolas"/>
                 <a:cs typeface="Consolas"/>
-              </a:defRPr>
-            </a:pPr>
-            <a:r>
-              <a:rPr sz="1725" b="0">
+              </a:rPr>
+              <a:t>:</a:t>
+            </a:r>
+          </a:p>
+          <a:p>
+            <a:pPr>
+              <a:lnSpc>
+                <a:spcPct val="120000"/>
+              </a:lnSpc>
+              <a:spcAft>
+                <a:spcPts val="0"/>
+              </a:spcAft>
+              <a:buNone/>
+              <a:defRPr sz="1725" b="0">
                 <a:solidFill>
                   <a:srgbClr val="29263B"/>
                 </a:solidFill>
                 <a:latin typeface="Consolas"/>
                 <a:ea typeface="Consolas"/>
                 <a:cs typeface="Consolas"/>
-              </a:rPr>
-              <a:t>      help: compile a Zephyr application</a:t>
+              </a:defRPr>
+            </a:pPr>
+            <a:r>
+              <a:rPr sz="1725" b="0">
+                <a:solidFill>
+                  <a:srgbClr val="29263B"/>
+                </a:solidFill>
+                <a:latin typeface="Consolas"/>
+                <a:ea typeface="Consolas"/>
+                <a:cs typeface="Consolas"/>
+              </a:rPr>
+              <a:t>    - </a:t>
+            </a:r>
+            <a:r>
+              <a:rPr sz="1725" b="0">
+                <a:solidFill>
+                  <a:srgbClr val="B84E00"/>
+                </a:solidFill>
+                <a:latin typeface="Consolas"/>
+                <a:ea typeface="Consolas"/>
+                <a:cs typeface="Consolas"/>
+              </a:rPr>
+              <a:t>name</a:t>
+            </a:r>
+            <a:r>
+              <a:rPr sz="1725" b="0">
+                <a:solidFill>
+                  <a:srgbClr val="29263B"/>
+                </a:solidFill>
+                <a:latin typeface="Consolas"/>
+                <a:ea typeface="Consolas"/>
+                <a:cs typeface="Consolas"/>
+              </a:rPr>
+              <a:t>: build</a:t>
+            </a:r>
+          </a:p>
+          <a:p>
+            <a:pPr>
+              <a:lnSpc>
+                <a:spcPct val="120000"/>
+              </a:lnSpc>
+              <a:spcAft>
+                <a:spcPts val="0"/>
+              </a:spcAft>
+              <a:buNone/>
+              <a:defRPr sz="1725" b="0">
+                <a:solidFill>
+                  <a:srgbClr val="29263B"/>
+                </a:solidFill>
+                <a:latin typeface="Consolas"/>
+                <a:ea typeface="Consolas"/>
+                <a:cs typeface="Consolas"/>
+              </a:defRPr>
+            </a:pPr>
+            <a:r>
+              <a:rPr sz="1725" b="0">
+                <a:solidFill>
+                  <a:srgbClr val="29263B"/>
+                </a:solidFill>
+                <a:latin typeface="Consolas"/>
+                <a:ea typeface="Consolas"/>
+                <a:cs typeface="Consolas"/>
+              </a:rPr>
+              <a:t>      </a:t>
+            </a:r>
+            <a:r>
+              <a:rPr sz="1725" b="0">
+                <a:solidFill>
+                  <a:srgbClr val="B84E00"/>
+                </a:solidFill>
+                <a:latin typeface="Consolas"/>
+                <a:ea typeface="Consolas"/>
+                <a:cs typeface="Consolas"/>
+              </a:rPr>
+              <a:t>class</a:t>
+            </a:r>
+            <a:r>
+              <a:rPr sz="1725" b="0">
+                <a:solidFill>
+                  <a:srgbClr val="29263B"/>
+                </a:solidFill>
+                <a:latin typeface="Consolas"/>
+                <a:ea typeface="Consolas"/>
+                <a:cs typeface="Consolas"/>
+              </a:rPr>
+              <a:t>: Build</a:t>
+            </a:r>
+          </a:p>
+          <a:p>
+            <a:pPr>
+              <a:lnSpc>
+                <a:spcPct val="120000"/>
+              </a:lnSpc>
+              <a:spcAft>
+                <a:spcPts val="0"/>
+              </a:spcAft>
+              <a:buNone/>
+              <a:defRPr sz="1725" b="0">
+                <a:solidFill>
+                  <a:srgbClr val="29263B"/>
+                </a:solidFill>
+                <a:latin typeface="Consolas"/>
+                <a:ea typeface="Consolas"/>
+                <a:cs typeface="Consolas"/>
+              </a:defRPr>
+            </a:pPr>
+            <a:r>
+              <a:rPr sz="1725" b="0">
+                <a:solidFill>
+                  <a:srgbClr val="29263B"/>
+                </a:solidFill>
+                <a:latin typeface="Consolas"/>
+                <a:ea typeface="Consolas"/>
+                <a:cs typeface="Consolas"/>
+              </a:rPr>
+              <a:t>      </a:t>
+            </a:r>
+            <a:r>
+              <a:rPr sz="1725" b="0">
+                <a:solidFill>
+                  <a:srgbClr val="B84E00"/>
+                </a:solidFill>
+                <a:latin typeface="Consolas"/>
+                <a:ea typeface="Consolas"/>
+                <a:cs typeface="Consolas"/>
+              </a:rPr>
+              <a:t>help</a:t>
+            </a:r>
+            <a:r>
+              <a:rPr sz="1725" b="0">
+                <a:solidFill>
+                  <a:srgbClr val="29263B"/>
+                </a:solidFill>
+                <a:latin typeface="Consolas"/>
+                <a:ea typeface="Consolas"/>
+                <a:cs typeface="Consolas"/>
+              </a:rPr>
+              <a:t>: compile a Zephyr application</a:t>
             </a:r>
           </a:p>
         </p:txBody>
@@ -27182,7 +27657,51 @@
                 <a:ea typeface="Microsoft YaHei"/>
                 <a:cs typeface="Microsoft YaHei"/>
               </a:rPr>
-              <a:t>上游 west.yml 的 self.west-commands 指向 scripts/west-commands.yml。</a:t>
+              <a:t>上游 </a:t>
+            </a:r>
+            <a:r>
+              <a:rPr sz="1800" b="0">
+                <a:solidFill>
+                  <a:srgbClr val="0070C0"/>
+                </a:solidFill>
+                <a:latin typeface="Microsoft YaHei"/>
+                <a:ea typeface="Microsoft YaHei"/>
+                <a:cs typeface="Microsoft YaHei"/>
+              </a:rPr>
+              <a:t>west.yml</a:t>
+            </a:r>
+            <a:r>
+              <a:rPr sz="1800" b="0">
+                <a:solidFill>
+                  <a:srgbClr val="29263B"/>
+                </a:solidFill>
+                <a:latin typeface="Microsoft YaHei"/>
+                <a:ea typeface="Microsoft YaHei"/>
+                <a:cs typeface="Microsoft YaHei"/>
+              </a:rPr>
+              <a:t> 的 self.west-commands 指向 </a:t>
+            </a:r>
+            <a:r>
+              <a:rPr sz="1800" b="0">
+                <a:solidFill>
+                  <a:srgbClr val="0070C0"/>
+                </a:solidFill>
+                <a:latin typeface="Microsoft YaHei"/>
+                <a:ea typeface="Microsoft YaHei"/>
+                <a:cs typeface="Microsoft YaHei"/>
+              </a:rPr>
+              <a:t>scripts/west-commands.yml</a:t>
+            </a:r>
+            <a:r>
+              <a:rPr sz="1800" b="0">
+                <a:solidFill>
+                  <a:srgbClr val="29263B"/>
+                </a:solidFill>
+                <a:latin typeface="Microsoft YaHei"/>
+                <a:ea typeface="Microsoft YaHei"/>
+                <a:cs typeface="Microsoft YaHei"/>
+              </a:rPr>
+              <a:t>。</a:t>
             </a:r>
           </a:p>
           <a:p>
@@ -27282,7 +27801,22 @@
               <a:rPr u="sng">
                 <a:hlinkClick r:id="R8186c331b11a462c"/>
               </a:rPr>
-              <a:t>依据：scripts/west-commands.yml；只读官方原文件</a:t>
+              <a:t>依据：</a:t>
+            </a:r>
+            <a:r>
+              <a:rPr u="sng">
+                <a:solidFill>
+                  <a:srgbClr val="0070C0"/>
+                </a:solidFill>
+                <a:hlinkClick r:id="R8186c331b11a462c"/>
+              </a:rPr>
+              <a:t>scripts/west-commands.yml</a:t>
+            </a:r>
+            <a:r>
+              <a:rPr u="sng">
+                <a:hlinkClick r:id="R8186c331b11a462c"/>
+              </a:rPr>
+              <a:t>；只读官方原文件</a:t>
             </a:r>
           </a:p>
         </p:txBody>
@@ -27685,7 +28219,7 @@
             <a:r>
               <a:rPr sz="1725" b="0">
                 <a:solidFill>
-                  <a:srgbClr val="29263B"/>
+                  <a:srgbClr val="646173"/>
                 </a:solidFill>
                 <a:latin typeface="Consolas"/>
                 <a:ea typeface="Consolas"/>
@@ -27775,91 +28309,113 @@
                 <a:ea typeface="Consolas"/>
                 <a:cs typeface="Consolas"/>
               </a:rPr>
-              <a:t> .venv</a:t>
-            </a:r>
-            <a:r>
-              <a:rPr>
+              <a:t> </a:t>
+            </a:r>
+            <a:r>
+              <a:rPr sz="1725" b="0">
                 <a:solidFill>
                   <a:srgbClr val="0070C0"/>
-                </a:solidFill>
-              </a:rPr>
-              <a:t>/Scripts/activate</a:t>
-            </a:r>
-          </a:p>
-          <a:p>
-            <a:pPr>
-              <a:lnSpc>
-                <a:spcPct val="120000"/>
-              </a:lnSpc>
-              <a:spcAft>
-                <a:spcPts val="0"/>
-              </a:spcAft>
-              <a:buNone/>
-              <a:defRPr sz="1725" b="0">
-                <a:solidFill>
-                  <a:srgbClr val="29263B"/>
                 </a:solidFill>
                 <a:latin typeface="Consolas"/>
                 <a:ea typeface="Consolas"/>
                 <a:cs typeface="Consolas"/>
-              </a:defRPr>
-            </a:pPr>
+              </a:rPr>
+              <a:t>.venv</a:t>
+            </a:r>
             <a:r>
               <a:rPr>
                 <a:solidFill>
-                  <a:srgbClr val="A02B93"/>
-                </a:solidFill>
-              </a:rPr>
-              <a:t>west</a:t>
-            </a:r>
-            <a:r>
-              <a:rPr sz="1725" b="0">
+                  <a:srgbClr val="0070C0"/>
+                </a:solidFill>
+              </a:rPr>
+              <a:t>/Scripts/activate</a:t>
+            </a:r>
+          </a:p>
+          <a:p>
+            <a:pPr>
+              <a:lnSpc>
+                <a:spcPct val="120000"/>
+              </a:lnSpc>
+              <a:spcAft>
+                <a:spcPts val="0"/>
+              </a:spcAft>
+              <a:buNone/>
+              <a:defRPr sz="1725" b="0">
                 <a:solidFill>
                   <a:srgbClr val="29263B"/>
                 </a:solidFill>
                 <a:latin typeface="Consolas"/>
                 <a:ea typeface="Consolas"/>
                 <a:cs typeface="Consolas"/>
-              </a:rPr>
-              <a:t> help build</a:t>
-            </a:r>
-          </a:p>
-          <a:p>
-            <a:pPr>
-              <a:lnSpc>
-                <a:spcPct val="120000"/>
-              </a:lnSpc>
-              <a:spcAft>
-                <a:spcPts val="0"/>
-              </a:spcAft>
-              <a:buNone/>
-              <a:defRPr sz="1725" b="0">
+              </a:defRPr>
+            </a:pPr>
+            <a:r>
+              <a:rPr>
+                <a:solidFill>
+                  <a:srgbClr val="A02B93"/>
+                </a:solidFill>
+              </a:rPr>
+              <a:t>west</a:t>
+            </a:r>
+            <a:r>
+              <a:rPr sz="1725" b="0">
                 <a:solidFill>
                   <a:srgbClr val="29263B"/>
                 </a:solidFill>
                 <a:latin typeface="Consolas"/>
                 <a:ea typeface="Consolas"/>
                 <a:cs typeface="Consolas"/>
-              </a:defRPr>
-            </a:pPr>
-            <a:r>
-              <a:rPr>
-                <a:solidFill>
-                  <a:srgbClr val="A02B93"/>
-                </a:solidFill>
-              </a:rPr>
-              <a:t>west</a:t>
-            </a:r>
-            <a:r>
-              <a:rPr sz="1725" b="0">
+              </a:rPr>
+              <a:t> help build</a:t>
+            </a:r>
+          </a:p>
+          <a:p>
+            <a:pPr>
+              <a:lnSpc>
+                <a:spcPct val="120000"/>
+              </a:lnSpc>
+              <a:spcAft>
+                <a:spcPts val="0"/>
+              </a:spcAft>
+              <a:buNone/>
+              <a:defRPr sz="1725" b="0">
                 <a:solidFill>
                   <a:srgbClr val="29263B"/>
                 </a:solidFill>
                 <a:latin typeface="Consolas"/>
                 <a:ea typeface="Consolas"/>
                 <a:cs typeface="Consolas"/>
-              </a:rPr>
-              <a:t> build --help</a:t>
+              </a:defRPr>
+            </a:pPr>
+            <a:r>
+              <a:rPr>
+                <a:solidFill>
+                  <a:srgbClr val="A02B93"/>
+                </a:solidFill>
+              </a:rPr>
+              <a:t>west</a:t>
+            </a:r>
+            <a:r>
+              <a:rPr sz="1725" b="0">
+                <a:solidFill>
+                  <a:srgbClr val="29263B"/>
+                </a:solidFill>
+                <a:latin typeface="Consolas"/>
+                <a:ea typeface="Consolas"/>
+                <a:cs typeface="Consolas"/>
+              </a:rPr>
+              <a:t> build </a:t>
+            </a:r>
+            <a:r>
+              <a:rPr sz="1725" b="0">
+                <a:solidFill>
+                  <a:srgbClr val="B84E00"/>
+                </a:solidFill>
+                <a:latin typeface="Consolas"/>
+                <a:ea typeface="Consolas"/>
+                <a:cs typeface="Consolas"/>
+              </a:rPr>
+              <a:t>--help</a:t>
             </a:r>
           </a:p>
         </p:txBody>
@@ -28034,7 +28590,16 @@
               <a:rPr u="sng">
                 <a:hlinkClick r:id="R2f1cf53dd0214bf3"/>
               </a:rPr>
-              <a:t>依据：doc/develop/west/extensions.rst</a:t>
+              <a:t>依据：</a:t>
+            </a:r>
+            <a:r>
+              <a:rPr u="sng">
+                <a:solidFill>
+                  <a:srgbClr val="0070C0"/>
+                </a:solidFill>
+                <a:hlinkClick r:id="R2f1cf53dd0214bf3"/>
+              </a:rPr>
+              <a:t>doc/develop/west/extensions.rst</a:t>
             </a:r>
           </a:p>
         </p:txBody>
@@ -28507,13 +29072,24 @@
             <a:r>
               <a:rPr sz="1950" b="0">
                 <a:solidFill>
-                  <a:srgbClr val="29263B"/>
-                </a:solidFill>
-                <a:latin typeface="Microsoft YaHei"/>
-                <a:ea typeface="Microsoft YaHei"/>
-                <a:cs typeface="Microsoft YaHei"/>
-              </a:rPr>
-              <a:t>west 解析板、应用、目录与参数，需要时先调用 CMake 配置。</a:t>
+                  <a:srgbClr val="A02B93"/>
+                </a:solidFill>
+                <a:latin typeface="Microsoft YaHei"/>
+                <a:ea typeface="Microsoft YaHei"/>
+                <a:cs typeface="Microsoft YaHei"/>
+              </a:rPr>
+              <a:t>west</a:t>
+            </a:r>
+            <a:r>
+              <a:rPr sz="1950" b="0">
+                <a:solidFill>
+                  <a:srgbClr val="29263B"/>
+                </a:solidFill>
+                <a:latin typeface="Microsoft YaHei"/>
+                <a:ea typeface="Microsoft YaHei"/>
+                <a:cs typeface="Microsoft YaHei"/>
+              </a:rPr>
+              <a:t> 解析板、应用、目录与参数，需要时先调用 CMake 配置。</a:t>
             </a:r>
           </a:p>
           <a:p>
@@ -28543,7 +29119,51 @@
                 <a:ea typeface="Microsoft YaHei"/>
                 <a:cs typeface="Microsoft YaHei"/>
               </a:rPr>
-              <a:t>随后调用 cmake --build；CMake 再调用 Ninja。</a:t>
+              <a:t>随后调用 </a:t>
+            </a:r>
+            <a:r>
+              <a:rPr sz="1950" b="0">
+                <a:solidFill>
+                  <a:srgbClr val="A02B93"/>
+                </a:solidFill>
+                <a:latin typeface="Microsoft YaHei"/>
+                <a:ea typeface="Microsoft YaHei"/>
+                <a:cs typeface="Microsoft YaHei"/>
+              </a:rPr>
+              <a:t>cmake</a:t>
+            </a:r>
+            <a:r>
+              <a:rPr sz="1950" b="0">
+                <a:solidFill>
+                  <a:srgbClr val="29263B"/>
+                </a:solidFill>
+                <a:latin typeface="Microsoft YaHei"/>
+                <a:ea typeface="Microsoft YaHei"/>
+                <a:cs typeface="Microsoft YaHei"/>
+              </a:rPr>
+              <a:t> </a:t>
+            </a:r>
+            <a:r>
+              <a:rPr sz="1950" b="0">
+                <a:solidFill>
+                  <a:srgbClr val="B84E00"/>
+                </a:solidFill>
+                <a:latin typeface="Microsoft YaHei"/>
+                <a:ea typeface="Microsoft YaHei"/>
+                <a:cs typeface="Microsoft YaHei"/>
+              </a:rPr>
+              <a:t>--build</a:t>
+            </a:r>
+            <a:r>
+              <a:rPr sz="1950" b="0">
+                <a:solidFill>
+                  <a:srgbClr val="29263B"/>
+                </a:solidFill>
+                <a:latin typeface="Microsoft YaHei"/>
+                <a:ea typeface="Microsoft YaHei"/>
+                <a:cs typeface="Microsoft YaHei"/>
+              </a:rPr>
+              <a:t>；CMake 再调用 Ninja。</a:t>
             </a:r>
           </a:p>
           <a:p>
@@ -28641,13 +29261,24 @@
             <a:r>
               <a:rPr sz="1725">
                 <a:solidFill>
-                  <a:srgbClr val="29263B"/>
-                </a:solidFill>
-                <a:latin typeface="Microsoft YaHei"/>
-                <a:ea typeface="Microsoft YaHei"/>
-                <a:cs typeface="Microsoft YaHei"/>
-              </a:rPr>
-              <a:t>west / Build</a:t>
+                  <a:srgbClr val="A02B93"/>
+                </a:solidFill>
+                <a:latin typeface="Microsoft YaHei"/>
+                <a:ea typeface="Microsoft YaHei"/>
+                <a:cs typeface="Microsoft YaHei"/>
+              </a:rPr>
+              <a:t>west</a:t>
+            </a:r>
+            <a:r>
+              <a:rPr sz="1725">
+                <a:solidFill>
+                  <a:srgbClr val="29263B"/>
+                </a:solidFill>
+                <a:latin typeface="Microsoft YaHei"/>
+                <a:ea typeface="Microsoft YaHei"/>
+                <a:cs typeface="Microsoft YaHei"/>
+              </a:rPr>
+              <a:t> / Build</a:t>
             </a:r>
           </a:p>
         </p:txBody>
@@ -28939,7 +29570,7 @@
             <a:r>
               <a:rPr sz="1725">
                 <a:solidFill>
-                  <a:srgbClr val="29263B"/>
+                  <a:srgbClr val="0070C0"/>
                 </a:solidFill>
                 <a:latin typeface="Microsoft YaHei"/>
                 <a:ea typeface="Microsoft YaHei"/>
@@ -29088,13 +29719,35 @@
             <a:r>
               <a:rPr sz="1725">
                 <a:solidFill>
-                  <a:srgbClr val="29263B"/>
-                </a:solidFill>
-                <a:latin typeface="Microsoft YaHei"/>
-                <a:ea typeface="Microsoft YaHei"/>
-                <a:cs typeface="Microsoft YaHei"/>
-              </a:rPr>
-              <a:t>cmake --build</a:t>
+                  <a:srgbClr val="A02B93"/>
+                </a:solidFill>
+                <a:latin typeface="Microsoft YaHei"/>
+                <a:ea typeface="Microsoft YaHei"/>
+                <a:cs typeface="Microsoft YaHei"/>
+              </a:rPr>
+              <a:t>cmake</a:t>
+            </a:r>
+            <a:r>
+              <a:rPr sz="1725">
+                <a:solidFill>
+                  <a:srgbClr val="29263B"/>
+                </a:solidFill>
+                <a:latin typeface="Microsoft YaHei"/>
+                <a:ea typeface="Microsoft YaHei"/>
+                <a:cs typeface="Microsoft YaHei"/>
+              </a:rPr>
+              <a:t> </a:t>
+            </a:r>
+            <a:r>
+              <a:rPr sz="1725">
+                <a:solidFill>
+                  <a:srgbClr val="B84E00"/>
+                </a:solidFill>
+                <a:latin typeface="Microsoft YaHei"/>
+                <a:ea typeface="Microsoft YaHei"/>
+                <a:cs typeface="Microsoft YaHei"/>
+              </a:rPr>
+              <a:t>--build</a:t>
             </a:r>
           </a:p>
         </p:txBody>
@@ -29386,7 +30039,7 @@
             <a:r>
               <a:rPr sz="1725">
                 <a:solidFill>
-                  <a:srgbClr val="29263B"/>
+                  <a:srgbClr val="0070C0"/>
                 </a:solidFill>
                 <a:latin typeface="Microsoft YaHei"/>
                 <a:ea typeface="Microsoft YaHei"/>
@@ -29865,13 +30518,134 @@
             <a:r>
               <a:rPr sz="1950" b="0">
                 <a:solidFill>
-                  <a:srgbClr val="29263B"/>
-                </a:solidFill>
-                <a:latin typeface="Microsoft YaHei"/>
-                <a:ea typeface="Microsoft YaHei"/>
-                <a:cs typeface="Microsoft YaHei"/>
-              </a:rPr>
-              <a:t>west 的应用位置 → CMake -S；-d → -B；-b → -DBOARD。</a:t>
+                  <a:srgbClr val="A02B93"/>
+                </a:solidFill>
+                <a:latin typeface="Microsoft YaHei"/>
+                <a:ea typeface="Microsoft YaHei"/>
+                <a:cs typeface="Microsoft YaHei"/>
+              </a:rPr>
+              <a:t>west</a:t>
+            </a:r>
+            <a:r>
+              <a:rPr sz="1950" b="0">
+                <a:solidFill>
+                  <a:srgbClr val="29263B"/>
+                </a:solidFill>
+                <a:latin typeface="Microsoft YaHei"/>
+                <a:ea typeface="Microsoft YaHei"/>
+                <a:cs typeface="Microsoft YaHei"/>
+              </a:rPr>
+              <a:t> 的应用位置 → CMake </a:t>
+            </a:r>
+            <a:r>
+              <a:rPr sz="1950" b="0">
+                <a:solidFill>
+                  <a:srgbClr val="B84E00"/>
+                </a:solidFill>
+                <a:latin typeface="Microsoft YaHei"/>
+                <a:ea typeface="Microsoft YaHei"/>
+                <a:cs typeface="Microsoft YaHei"/>
+              </a:rPr>
+              <a:t>-S</a:t>
+            </a:r>
+            <a:r>
+              <a:rPr sz="1950" b="0">
+                <a:solidFill>
+                  <a:srgbClr val="29263B"/>
+                </a:solidFill>
+                <a:latin typeface="Microsoft YaHei"/>
+                <a:ea typeface="Microsoft YaHei"/>
+                <a:cs typeface="Microsoft YaHei"/>
+              </a:rPr>
+              <a:t>；</a:t>
+            </a:r>
+            <a:r>
+              <a:rPr sz="1950" b="0">
+                <a:solidFill>
+                  <a:srgbClr val="B84E00"/>
+                </a:solidFill>
+                <a:latin typeface="Microsoft YaHei"/>
+                <a:ea typeface="Microsoft YaHei"/>
+                <a:cs typeface="Microsoft YaHei"/>
+              </a:rPr>
+              <a:t>-d</a:t>
+            </a:r>
+            <a:r>
+              <a:rPr sz="1950" b="0">
+                <a:solidFill>
+                  <a:srgbClr val="29263B"/>
+                </a:solidFill>
+                <a:latin typeface="Microsoft YaHei"/>
+                <a:ea typeface="Microsoft YaHei"/>
+                <a:cs typeface="Microsoft YaHei"/>
+              </a:rPr>
+              <a:t> → </a:t>
+            </a:r>
+            <a:r>
+              <a:rPr sz="1950" b="0">
+                <a:solidFill>
+                  <a:srgbClr val="B84E00"/>
+                </a:solidFill>
+                <a:latin typeface="Microsoft YaHei"/>
+                <a:ea typeface="Microsoft YaHei"/>
+                <a:cs typeface="Microsoft YaHei"/>
+              </a:rPr>
+              <a:t>-B</a:t>
+            </a:r>
+            <a:r>
+              <a:rPr sz="1950" b="0">
+                <a:solidFill>
+                  <a:srgbClr val="29263B"/>
+                </a:solidFill>
+                <a:latin typeface="Microsoft YaHei"/>
+                <a:ea typeface="Microsoft YaHei"/>
+                <a:cs typeface="Microsoft YaHei"/>
+              </a:rPr>
+              <a:t>；</a:t>
+            </a:r>
+            <a:r>
+              <a:rPr sz="1950" b="0">
+                <a:solidFill>
+                  <a:srgbClr val="B84E00"/>
+                </a:solidFill>
+                <a:latin typeface="Microsoft YaHei"/>
+                <a:ea typeface="Microsoft YaHei"/>
+                <a:cs typeface="Microsoft YaHei"/>
+              </a:rPr>
+              <a:t>-b</a:t>
+            </a:r>
+            <a:r>
+              <a:rPr sz="1950" b="0">
+                <a:solidFill>
+                  <a:srgbClr val="29263B"/>
+                </a:solidFill>
+                <a:latin typeface="Microsoft YaHei"/>
+                <a:ea typeface="Microsoft YaHei"/>
+                <a:cs typeface="Microsoft YaHei"/>
+              </a:rPr>
+              <a:t> → </a:t>
+            </a:r>
+            <a:r>
+              <a:rPr sz="1950" b="0">
+                <a:solidFill>
+                  <a:srgbClr val="B84E00"/>
+                </a:solidFill>
+                <a:latin typeface="Microsoft YaHei"/>
+                <a:ea typeface="Microsoft YaHei"/>
+                <a:cs typeface="Microsoft YaHei"/>
+              </a:rPr>
+              <a:t>-DBOARD</a:t>
+            </a:r>
+            <a:r>
+              <a:rPr sz="1950" b="0">
+                <a:solidFill>
+                  <a:srgbClr val="29263B"/>
+                </a:solidFill>
+                <a:latin typeface="Microsoft YaHei"/>
+                <a:ea typeface="Microsoft YaHei"/>
+                <a:cs typeface="Microsoft YaHei"/>
+              </a:rPr>
+              <a:t>。</a:t>
             </a:r>
           </a:p>
           <a:p>
@@ -29901,7 +30675,29 @@
                 <a:ea typeface="Microsoft YaHei"/>
                 <a:cs typeface="Microsoft YaHei"/>
               </a:rPr>
-              <a:t>默认生成器 Ninja → -G Ninja；-- 后参数交给 CMake 配置器。</a:t>
+              <a:t>默认生成器 Ninja → </a:t>
+            </a:r>
+            <a:r>
+              <a:rPr sz="1950" b="0">
+                <a:solidFill>
+                  <a:srgbClr val="B84E00"/>
+                </a:solidFill>
+                <a:latin typeface="Microsoft YaHei"/>
+                <a:ea typeface="Microsoft YaHei"/>
+                <a:cs typeface="Microsoft YaHei"/>
+              </a:rPr>
+              <a:t>-G</a:t>
+            </a:r>
+            <a:r>
+              <a:rPr sz="1950" b="0">
+                <a:solidFill>
+                  <a:srgbClr val="29263B"/>
+                </a:solidFill>
+                <a:latin typeface="Microsoft YaHei"/>
+                <a:ea typeface="Microsoft YaHei"/>
+                <a:cs typeface="Microsoft YaHei"/>
+              </a:rPr>
+              <a:t> Ninja；-- 后参数交给 CMake 配置器。</a:t>
             </a:r>
           </a:p>
           <a:p>
@@ -29925,13 +30721,68 @@
             <a:r>
               <a:rPr sz="1950" b="0">
                 <a:solidFill>
-                  <a:srgbClr val="29263B"/>
-                </a:solidFill>
-                <a:latin typeface="Microsoft YaHei"/>
-                <a:ea typeface="Microsoft YaHei"/>
-                <a:cs typeface="Microsoft YaHei"/>
-              </a:rPr>
-              <a:t>west 还传 WEST_PYTHON / WEST_TOPDIR 等上下文，不要求手填。</a:t>
+                  <a:srgbClr val="A02B93"/>
+                </a:solidFill>
+                <a:latin typeface="Microsoft YaHei"/>
+                <a:ea typeface="Microsoft YaHei"/>
+                <a:cs typeface="Microsoft YaHei"/>
+              </a:rPr>
+              <a:t>west</a:t>
+            </a:r>
+            <a:r>
+              <a:rPr sz="1950" b="0">
+                <a:solidFill>
+                  <a:srgbClr val="29263B"/>
+                </a:solidFill>
+                <a:latin typeface="Microsoft YaHei"/>
+                <a:ea typeface="Microsoft YaHei"/>
+                <a:cs typeface="Microsoft YaHei"/>
+              </a:rPr>
+              <a:t> 还传 </a:t>
+            </a:r>
+            <a:r>
+              <a:rPr sz="1950" b="0">
+                <a:solidFill>
+                  <a:srgbClr val="B84E00"/>
+                </a:solidFill>
+                <a:latin typeface="Microsoft YaHei"/>
+                <a:ea typeface="Microsoft YaHei"/>
+                <a:cs typeface="Microsoft YaHei"/>
+              </a:rPr>
+              <a:t>WEST_PYTHON</a:t>
+            </a:r>
+            <a:r>
+              <a:rPr sz="1950" b="0">
+                <a:solidFill>
+                  <a:srgbClr val="29263B"/>
+                </a:solidFill>
+                <a:latin typeface="Microsoft YaHei"/>
+                <a:ea typeface="Microsoft YaHei"/>
+                <a:cs typeface="Microsoft YaHei"/>
+              </a:rPr>
+              <a:t> / </a:t>
+            </a:r>
+            <a:r>
+              <a:rPr sz="1950" b="0">
+                <a:solidFill>
+                  <a:srgbClr val="B84E00"/>
+                </a:solidFill>
+                <a:latin typeface="Microsoft YaHei"/>
+                <a:ea typeface="Microsoft YaHei"/>
+                <a:cs typeface="Microsoft YaHei"/>
+              </a:rPr>
+              <a:t>WEST_TOPDIR</a:t>
+            </a:r>
+            <a:r>
+              <a:rPr sz="1950" b="0">
+                <a:solidFill>
+                  <a:srgbClr val="29263B"/>
+                </a:solidFill>
+                <a:latin typeface="Microsoft YaHei"/>
+                <a:ea typeface="Microsoft YaHei"/>
+                <a:cs typeface="Microsoft YaHei"/>
+              </a:rPr>
+              <a:t> 等上下文，不要求手填。</a:t>
             </a:r>
           </a:p>
           <a:p>
@@ -30031,7 +30882,16 @@
               <a:rPr u="sng">
                 <a:hlinkClick r:id="R2a153fc397e74d6b"/>
               </a:rPr>
-              <a:t>依据：doc/develop/west/build-flash-debug.rst</a:t>
+              <a:t>依据：</a:t>
+            </a:r>
+            <a:r>
+              <a:rPr u="sng">
+                <a:solidFill>
+                  <a:srgbClr val="0070C0"/>
+                </a:solidFill>
+                <a:hlinkClick r:id="R2a153fc397e74d6b"/>
+              </a:rPr>
+              <a:t>doc/develop/west/build-flash-debug.rst</a:t>
             </a:r>
           </a:p>
         </p:txBody>
@@ -30464,13 +31324,46 @@
             <a:r>
               <a:rPr sz="1950" b="0">
                 <a:solidFill>
-                  <a:srgbClr val="29263B"/>
-                </a:solidFill>
-                <a:latin typeface="Microsoft YaHei"/>
-                <a:ea typeface="Microsoft YaHei"/>
-                <a:cs typeface="Microsoft YaHei"/>
-              </a:rPr>
-              <a:t>-v 放在 build 前；--cmake-only 只配置与生成，不编译固件。</a:t>
+                  <a:srgbClr val="B84E00"/>
+                </a:solidFill>
+                <a:latin typeface="Microsoft YaHei"/>
+                <a:ea typeface="Microsoft YaHei"/>
+                <a:cs typeface="Microsoft YaHei"/>
+              </a:rPr>
+              <a:t>-v</a:t>
+            </a:r>
+            <a:r>
+              <a:rPr sz="1950" b="0">
+                <a:solidFill>
+                  <a:srgbClr val="29263B"/>
+                </a:solidFill>
+                <a:latin typeface="Microsoft YaHei"/>
+                <a:ea typeface="Microsoft YaHei"/>
+                <a:cs typeface="Microsoft YaHei"/>
+              </a:rPr>
+              <a:t> 放在 build 前；</a:t>
+            </a:r>
+            <a:r>
+              <a:rPr sz="1950" b="0">
+                <a:solidFill>
+                  <a:srgbClr val="B84E00"/>
+                </a:solidFill>
+                <a:latin typeface="Microsoft YaHei"/>
+                <a:ea typeface="Microsoft YaHei"/>
+                <a:cs typeface="Microsoft YaHei"/>
+              </a:rPr>
+              <a:t>--cmake-only</a:t>
+            </a:r>
+            <a:r>
+              <a:rPr sz="1950" b="0">
+                <a:solidFill>
+                  <a:srgbClr val="29263B"/>
+                </a:solidFill>
+                <a:latin typeface="Microsoft YaHei"/>
+                <a:ea typeface="Microsoft YaHei"/>
+                <a:cs typeface="Microsoft YaHei"/>
+              </a:rPr>
+              <a:t> 只配置与生成，不编译固件。</a:t>
             </a:r>
           </a:p>
           <a:p>
@@ -31091,7 +31984,16 @@
               <a:rPr u="sng">
                 <a:hlinkClick r:id="Rdbcb7bf678b64f60"/>
               </a:rPr>
-              <a:t>依据：doc/develop/west/build-flash-debug.rst</a:t>
+              <a:t>依据：</a:t>
+            </a:r>
+            <a:r>
+              <a:rPr u="sng">
+                <a:solidFill>
+                  <a:srgbClr val="0070C0"/>
+                </a:solidFill>
+                <a:hlinkClick r:id="Rdbcb7bf678b64f60"/>
+              </a:rPr>
+              <a:t>doc/develop/west/build-flash-debug.rst</a:t>
             </a:r>
           </a:p>
         </p:txBody>
@@ -31564,7 +32466,7 @@
             <a:r>
               <a:rPr sz="1725" b="0">
                 <a:solidFill>
-                  <a:srgbClr val="29263B"/>
+                  <a:srgbClr val="646173"/>
                 </a:solidFill>
                 <a:latin typeface="Consolas"/>
                 <a:ea typeface="Consolas"/>
@@ -31575,7 +32477,7 @@
             <a:r>
               <a:rPr>
                 <a:solidFill>
-                  <a:srgbClr val="A02B93"/>
+                  <a:srgbClr val="646173"/>
                 </a:solidFill>
               </a:rPr>
               <a:t>west</a:t>
@@ -31583,7 +32485,7 @@
             <a:r>
               <a:rPr sz="1725" b="0">
                 <a:solidFill>
-                  <a:srgbClr val="29263B"/>
+                  <a:srgbClr val="646173"/>
                 </a:solidFill>
                 <a:latin typeface="Consolas"/>
                 <a:ea typeface="Consolas"/>
@@ -31673,72 +32575,56 @@
                 <a:ea typeface="Consolas"/>
                 <a:cs typeface="Consolas"/>
               </a:rPr>
-              <a:t> .venv</a:t>
-            </a:r>
-            <a:r>
-              <a:rPr>
+              <a:t> </a:t>
+            </a:r>
+            <a:r>
+              <a:rPr sz="1725" b="0">
                 <a:solidFill>
                   <a:srgbClr val="0070C0"/>
-                </a:solidFill>
-              </a:rPr>
-              <a:t>/Scripts/activate</a:t>
-            </a:r>
-          </a:p>
-          <a:p>
-            <a:pPr>
-              <a:lnSpc>
-                <a:spcPct val="120000"/>
-              </a:lnSpc>
-              <a:spcAft>
-                <a:spcPts val="0"/>
-              </a:spcAft>
-              <a:buNone/>
-              <a:defRPr sz="1725" b="0">
-                <a:solidFill>
-                  <a:srgbClr val="29263B"/>
                 </a:solidFill>
                 <a:latin typeface="Consolas"/>
                 <a:ea typeface="Consolas"/>
                 <a:cs typeface="Consolas"/>
-              </a:defRPr>
-            </a:pPr>
-            <a:r>
-              <a:rPr sz="1725" b="0">
+              </a:rPr>
+              <a:t>.venv</a:t>
+            </a:r>
+            <a:r>
+              <a:rPr>
+                <a:solidFill>
+                  <a:srgbClr val="0070C0"/>
+                </a:solidFill>
+              </a:rPr>
+              <a:t>/Scripts/activate</a:t>
+            </a:r>
+          </a:p>
+          <a:p>
+            <a:pPr>
+              <a:lnSpc>
+                <a:spcPct val="120000"/>
+              </a:lnSpc>
+              <a:spcAft>
+                <a:spcPts val="0"/>
+              </a:spcAft>
+              <a:buNone/>
+              <a:defRPr sz="1725" b="0">
                 <a:solidFill>
                   <a:srgbClr val="29263B"/>
                 </a:solidFill>
                 <a:latin typeface="Consolas"/>
                 <a:ea typeface="Consolas"/>
                 <a:cs typeface="Consolas"/>
-              </a:rPr>
-              <a:t>if </a:t>
-            </a:r>
-            <a:r>
-              <a:rPr>
+              </a:defRPr>
+            </a:pPr>
+            <a:r>
+              <a:rPr sz="1725" b="0">
                 <a:solidFill>
                   <a:srgbClr val="A02B93"/>
-                </a:solidFill>
-              </a:rPr>
-              <a:t>west</a:t>
-            </a:r>
-            <a:r>
-              <a:rPr sz="1725" b="0">
-                <a:solidFill>
-                  <a:srgbClr val="29263B"/>
                 </a:solidFill>
                 <a:latin typeface="Consolas"/>
                 <a:ea typeface="Consolas"/>
                 <a:cs typeface="Consolas"/>
               </a:rPr>
-              <a:t> build -d build</a:t>
-            </a:r>
-            <a:r>
-              <a:rPr>
-                <a:solidFill>
-                  <a:srgbClr val="0070C0"/>
-                </a:solidFill>
-              </a:rPr>
-              <a:t>/learning-tools/west-demo</a:t>
+              <a:t>if</a:t>
             </a:r>
             <a:r>
               <a:rPr sz="1725" b="0">
@@ -31749,45 +32635,37 @@
                 <a:ea typeface="Consolas"/>
                 <a:cs typeface="Consolas"/>
               </a:rPr>
-              <a:t>; then</a:t>
-            </a:r>
-          </a:p>
-          <a:p>
-            <a:pPr>
-              <a:lnSpc>
-                <a:spcPct val="120000"/>
-              </a:lnSpc>
-              <a:spcAft>
-                <a:spcPts val="0"/>
-              </a:spcAft>
-              <a:buNone/>
-              <a:defRPr sz="1725" b="0">
+              <a:t> </a:t>
+            </a:r>
+            <a:r>
+              <a:rPr>
+                <a:solidFill>
+                  <a:srgbClr val="A02B93"/>
+                </a:solidFill>
+              </a:rPr>
+              <a:t>west</a:t>
+            </a:r>
+            <a:r>
+              <a:rPr sz="1725" b="0">
                 <a:solidFill>
                   <a:srgbClr val="29263B"/>
                 </a:solidFill>
                 <a:latin typeface="Consolas"/>
                 <a:ea typeface="Consolas"/>
                 <a:cs typeface="Consolas"/>
-              </a:defRPr>
-            </a:pPr>
+              </a:rPr>
+              <a:t> build </a:t>
+            </a:r>
             <a:r>
               <a:rPr sz="1725" b="0">
                 <a:solidFill>
-                  <a:srgbClr val="29263B"/>
+                  <a:srgbClr val="B84E00"/>
                 </a:solidFill>
                 <a:latin typeface="Consolas"/>
                 <a:ea typeface="Consolas"/>
                 <a:cs typeface="Consolas"/>
               </a:rPr>
-              <a:t>  </a:t>
-            </a:r>
-            <a:r>
-              <a:rPr>
-                <a:solidFill>
-                  <a:srgbClr val="A02B93"/>
-                </a:solidFill>
-              </a:rPr>
-              <a:t>ls</a:t>
+              <a:t>-d</a:t>
             </a:r>
             <a:r>
               <a:rPr sz="1725" b="0">
@@ -31798,35 +32676,27 @@
                 <a:ea typeface="Consolas"/>
                 <a:cs typeface="Consolas"/>
               </a:rPr>
-              <a:t> -l build</a:t>
-            </a:r>
-            <a:r>
-              <a:rPr>
+              <a:t> </a:t>
+            </a:r>
+            <a:r>
+              <a:rPr sz="1725" b="0">
                 <a:solidFill>
                   <a:srgbClr val="0070C0"/>
-                </a:solidFill>
-              </a:rPr>
-              <a:t>/learning-tools/west-demo/zephyr/zephyr.elf</a:t>
-            </a:r>
-          </a:p>
-          <a:p>
-            <a:pPr>
-              <a:lnSpc>
-                <a:spcPct val="120000"/>
-              </a:lnSpc>
-              <a:spcAft>
-                <a:spcPts val="0"/>
-              </a:spcAft>
-              <a:buNone/>
-              <a:defRPr sz="1725" b="0">
-                <a:solidFill>
-                  <a:srgbClr val="29263B"/>
                 </a:solidFill>
                 <a:latin typeface="Consolas"/>
                 <a:ea typeface="Consolas"/>
                 <a:cs typeface="Consolas"/>
-              </a:defRPr>
-            </a:pPr>
+              </a:rPr>
+              <a:t>build</a:t>
+            </a:r>
+            <a:r>
+              <a:rPr>
+                <a:solidFill>
+                  <a:srgbClr val="0070C0"/>
+                </a:solidFill>
+              </a:rPr>
+              <a:t>/learning-tools/west-demo</a:t>
+            </a:r>
             <a:r>
               <a:rPr sz="1725" b="0">
                 <a:solidFill>
@@ -31836,46 +32706,38 @@
                 <a:ea typeface="Consolas"/>
                 <a:cs typeface="Consolas"/>
               </a:rPr>
-              <a:t>else</a:t>
-            </a:r>
-          </a:p>
-          <a:p>
-            <a:pPr>
-              <a:lnSpc>
-                <a:spcPct val="120000"/>
-              </a:lnSpc>
-              <a:spcAft>
-                <a:spcPts val="0"/>
-              </a:spcAft>
-              <a:buNone/>
-              <a:defRPr sz="1725" b="0">
-                <a:solidFill>
-                  <a:srgbClr val="29263B"/>
+              <a:t>; </a:t>
+            </a:r>
+            <a:r>
+              <a:rPr sz="1725" b="0">
+                <a:solidFill>
+                  <a:srgbClr val="A02B93"/>
                 </a:solidFill>
                 <a:latin typeface="Consolas"/>
                 <a:ea typeface="Consolas"/>
                 <a:cs typeface="Consolas"/>
-              </a:defRPr>
-            </a:pPr>
-            <a:r>
-              <a:rPr sz="1725" b="0">
+              </a:rPr>
+              <a:t>then</a:t>
+            </a:r>
+          </a:p>
+          <a:p>
+            <a:pPr>
+              <a:lnSpc>
+                <a:spcPct val="120000"/>
+              </a:lnSpc>
+              <a:spcAft>
+                <a:spcPts val="0"/>
+              </a:spcAft>
+              <a:buNone/>
+              <a:defRPr sz="1725" b="0">
                 <a:solidFill>
                   <a:srgbClr val="29263B"/>
                 </a:solidFill>
                 <a:latin typeface="Consolas"/>
                 <a:ea typeface="Consolas"/>
                 <a:cs typeface="Consolas"/>
-              </a:rPr>
-              <a:t>  </a:t>
-            </a:r>
-            <a:r>
-              <a:rPr>
-                <a:solidFill>
-                  <a:srgbClr val="A02B93"/>
-                </a:solidFill>
-              </a:rPr>
-              <a:t>printf</a:t>
-            </a:r>
+              </a:defRPr>
+            </a:pPr>
             <a:r>
               <a:rPr sz="1725" b="0">
                 <a:solidFill>
@@ -31885,31 +32747,170 @@
                 <a:ea typeface="Consolas"/>
                 <a:cs typeface="Consolas"/>
               </a:rPr>
-              <a:t> '%s\n' '本次构建失败，不把已有 ELF 当成本次成功。'</a:t>
-            </a:r>
-          </a:p>
-          <a:p>
-            <a:pPr>
-              <a:lnSpc>
-                <a:spcPct val="120000"/>
-              </a:lnSpc>
-              <a:spcAft>
-                <a:spcPts val="0"/>
-              </a:spcAft>
-              <a:buNone/>
-              <a:defRPr sz="1725" b="0">
+              <a:t>  </a:t>
+            </a:r>
+            <a:r>
+              <a:rPr>
+                <a:solidFill>
+                  <a:srgbClr val="A02B93"/>
+                </a:solidFill>
+              </a:rPr>
+              <a:t>ls</a:t>
+            </a:r>
+            <a:r>
+              <a:rPr sz="1725" b="0">
                 <a:solidFill>
                   <a:srgbClr val="29263B"/>
                 </a:solidFill>
                 <a:latin typeface="Consolas"/>
                 <a:ea typeface="Consolas"/>
                 <a:cs typeface="Consolas"/>
+              </a:rPr>
+              <a:t> </a:t>
+            </a:r>
+            <a:r>
+              <a:rPr sz="1725" b="0">
+                <a:solidFill>
+                  <a:srgbClr val="B84E00"/>
+                </a:solidFill>
+                <a:latin typeface="Consolas"/>
+                <a:ea typeface="Consolas"/>
+                <a:cs typeface="Consolas"/>
+              </a:rPr>
+              <a:t>-l</a:t>
+            </a:r>
+            <a:r>
+              <a:rPr sz="1725" b="0">
+                <a:solidFill>
+                  <a:srgbClr val="29263B"/>
+                </a:solidFill>
+                <a:latin typeface="Consolas"/>
+                <a:ea typeface="Consolas"/>
+                <a:cs typeface="Consolas"/>
+              </a:rPr>
+              <a:t> </a:t>
+            </a:r>
+            <a:r>
+              <a:rPr sz="1725" b="0">
+                <a:solidFill>
+                  <a:srgbClr val="0070C0"/>
+                </a:solidFill>
+                <a:latin typeface="Consolas"/>
+                <a:ea typeface="Consolas"/>
+                <a:cs typeface="Consolas"/>
+              </a:rPr>
+              <a:t>build</a:t>
+            </a:r>
+            <a:r>
+              <a:rPr>
+                <a:solidFill>
+                  <a:srgbClr val="0070C0"/>
+                </a:solidFill>
+              </a:rPr>
+              <a:t>/learning-tools/west-demo/zephyr/zephyr.elf</a:t>
+            </a:r>
+          </a:p>
+          <a:p>
+            <a:pPr>
+              <a:lnSpc>
+                <a:spcPct val="120000"/>
+              </a:lnSpc>
+              <a:spcAft>
+                <a:spcPts val="0"/>
+              </a:spcAft>
+              <a:buNone/>
+              <a:defRPr sz="1725" b="0">
+                <a:solidFill>
+                  <a:srgbClr val="29263B"/>
+                </a:solidFill>
+                <a:latin typeface="Consolas"/>
+                <a:ea typeface="Consolas"/>
+                <a:cs typeface="Consolas"/>
               </a:defRPr>
             </a:pPr>
             <a:r>
               <a:rPr sz="1725" b="0">
                 <a:solidFill>
-                  <a:srgbClr val="29263B"/>
+                  <a:srgbClr val="A02B93"/>
+                </a:solidFill>
+                <a:latin typeface="Consolas"/>
+                <a:ea typeface="Consolas"/>
+                <a:cs typeface="Consolas"/>
+              </a:rPr>
+              <a:t>else</a:t>
+            </a:r>
+          </a:p>
+          <a:p>
+            <a:pPr>
+              <a:lnSpc>
+                <a:spcPct val="120000"/>
+              </a:lnSpc>
+              <a:spcAft>
+                <a:spcPts val="0"/>
+              </a:spcAft>
+              <a:buNone/>
+              <a:defRPr sz="1725" b="0">
+                <a:solidFill>
+                  <a:srgbClr val="29263B"/>
+                </a:solidFill>
+                <a:latin typeface="Consolas"/>
+                <a:ea typeface="Consolas"/>
+                <a:cs typeface="Consolas"/>
+              </a:defRPr>
+            </a:pPr>
+            <a:r>
+              <a:rPr sz="1725" b="0">
+                <a:solidFill>
+                  <a:srgbClr val="29263B"/>
+                </a:solidFill>
+                <a:latin typeface="Consolas"/>
+                <a:ea typeface="Consolas"/>
+                <a:cs typeface="Consolas"/>
+              </a:rPr>
+              <a:t>  </a:t>
+            </a:r>
+            <a:r>
+              <a:rPr>
+                <a:solidFill>
+                  <a:srgbClr val="A02B93"/>
+                </a:solidFill>
+              </a:rPr>
+              <a:t>printf</a:t>
+            </a:r>
+            <a:r>
+              <a:rPr sz="1725" b="0">
+                <a:solidFill>
+                  <a:srgbClr val="29263B"/>
+                </a:solidFill>
+                <a:latin typeface="Consolas"/>
+                <a:ea typeface="Consolas"/>
+                <a:cs typeface="Consolas"/>
+              </a:rPr>
+              <a:t> '%s\n' '本次构建失败，不把已有 ELF 当成本次成功。'</a:t>
+            </a:r>
+          </a:p>
+          <a:p>
+            <a:pPr>
+              <a:lnSpc>
+                <a:spcPct val="120000"/>
+              </a:lnSpc>
+              <a:spcAft>
+                <a:spcPts val="0"/>
+              </a:spcAft>
+              <a:buNone/>
+              <a:defRPr sz="1725" b="0">
+                <a:solidFill>
+                  <a:srgbClr val="29263B"/>
+                </a:solidFill>
+                <a:latin typeface="Consolas"/>
+                <a:ea typeface="Consolas"/>
+                <a:cs typeface="Consolas"/>
+              </a:defRPr>
+            </a:pPr>
+            <a:r>
+              <a:rPr sz="1725" b="0">
+                <a:solidFill>
+                  <a:srgbClr val="A02B93"/>
                 </a:solidFill>
                 <a:latin typeface="Consolas"/>
                 <a:ea typeface="Consolas"/>
@@ -32060,7 +33061,16 @@
               <a:rPr u="sng">
                 <a:hlinkClick r:id="R0ee6aa2ddd1b4c8d"/>
               </a:rPr>
-              <a:t>依据：doc/develop/west/build-flash-debug.rst</a:t>
+              <a:t>依据：</a:t>
+            </a:r>
+            <a:r>
+              <a:rPr u="sng">
+                <a:solidFill>
+                  <a:srgbClr val="0070C0"/>
+                </a:solidFill>
+                <a:hlinkClick r:id="R0ee6aa2ddd1b4c8d"/>
+              </a:rPr>
+              <a:t>doc/develop/west/build-flash-debug.rst</a:t>
             </a:r>
           </a:p>
         </p:txBody>
@@ -32539,7 +33549,51 @@
                 <a:ea typeface="Microsoft YaHei"/>
                 <a:cs typeface="Microsoft YaHei"/>
               </a:rPr>
-              <a:t>west-demo 配置成功后，cmake --build 可直接复用。</a:t>
+              <a:t>west-demo 配置成功后，</a:t>
+            </a:r>
+            <a:r>
+              <a:rPr sz="1950" b="0">
+                <a:solidFill>
+                  <a:srgbClr val="A02B93"/>
+                </a:solidFill>
+                <a:latin typeface="Microsoft YaHei"/>
+                <a:ea typeface="Microsoft YaHei"/>
+                <a:cs typeface="Microsoft YaHei"/>
+              </a:rPr>
+              <a:t>cmake</a:t>
+            </a:r>
+            <a:r>
+              <a:rPr sz="1950" b="0">
+                <a:solidFill>
+                  <a:srgbClr val="29263B"/>
+                </a:solidFill>
+                <a:latin typeface="Microsoft YaHei"/>
+                <a:ea typeface="Microsoft YaHei"/>
+                <a:cs typeface="Microsoft YaHei"/>
+              </a:rPr>
+              <a:t> </a:t>
+            </a:r>
+            <a:r>
+              <a:rPr sz="1950" b="0">
+                <a:solidFill>
+                  <a:srgbClr val="B84E00"/>
+                </a:solidFill>
+                <a:latin typeface="Microsoft YaHei"/>
+                <a:ea typeface="Microsoft YaHei"/>
+                <a:cs typeface="Microsoft YaHei"/>
+              </a:rPr>
+              <a:t>--build</a:t>
+            </a:r>
+            <a:r>
+              <a:rPr sz="1950" b="0">
+                <a:solidFill>
+                  <a:srgbClr val="29263B"/>
+                </a:solidFill>
+                <a:latin typeface="Microsoft YaHei"/>
+                <a:ea typeface="Microsoft YaHei"/>
+                <a:cs typeface="Microsoft YaHei"/>
+              </a:rPr>
+              <a:t> 可直接复用。</a:t>
             </a:r>
           </a:p>
           <a:p>
@@ -32569,7 +33623,51 @@
                 <a:ea typeface="Microsoft YaHei"/>
                 <a:cs typeface="Microsoft YaHei"/>
               </a:rPr>
-              <a:t>P007 的 cmake-demo 配置成功后，west build -d 也可复用。</a:t>
+              <a:t>P007 的 cmake-demo 配置成功后，</a:t>
+            </a:r>
+            <a:r>
+              <a:rPr sz="1950" b="0">
+                <a:solidFill>
+                  <a:srgbClr val="A02B93"/>
+                </a:solidFill>
+                <a:latin typeface="Microsoft YaHei"/>
+                <a:ea typeface="Microsoft YaHei"/>
+                <a:cs typeface="Microsoft YaHei"/>
+              </a:rPr>
+              <a:t>west</a:t>
+            </a:r>
+            <a:r>
+              <a:rPr sz="1950" b="0">
+                <a:solidFill>
+                  <a:srgbClr val="29263B"/>
+                </a:solidFill>
+                <a:latin typeface="Microsoft YaHei"/>
+                <a:ea typeface="Microsoft YaHei"/>
+                <a:cs typeface="Microsoft YaHei"/>
+              </a:rPr>
+              <a:t> build </a:t>
+            </a:r>
+            <a:r>
+              <a:rPr sz="1950" b="0">
+                <a:solidFill>
+                  <a:srgbClr val="B84E00"/>
+                </a:solidFill>
+                <a:latin typeface="Microsoft YaHei"/>
+                <a:ea typeface="Microsoft YaHei"/>
+                <a:cs typeface="Microsoft YaHei"/>
+              </a:rPr>
+              <a:t>-d</a:t>
+            </a:r>
+            <a:r>
+              <a:rPr sz="1950" b="0">
+                <a:solidFill>
+                  <a:srgbClr val="29263B"/>
+                </a:solidFill>
+                <a:latin typeface="Microsoft YaHei"/>
+                <a:ea typeface="Microsoft YaHei"/>
+                <a:cs typeface="Microsoft YaHei"/>
+              </a:rPr>
+              <a:t> 也可复用。</a:t>
             </a:r>
           </a:p>
           <a:p>
@@ -32629,7 +33727,29 @@
                 <a:ea typeface="Microsoft YaHei"/>
                 <a:cs typeface="Microsoft YaHei"/>
               </a:rPr>
-              <a:t>切换入口不会清除旧 SDK、BOARD 或生成器选择。</a:t>
+              <a:t>切换入口不会清除旧 SDK、</a:t>
+            </a:r>
+            <a:r>
+              <a:rPr sz="1950" b="0">
+                <a:solidFill>
+                  <a:srgbClr val="B84E00"/>
+                </a:solidFill>
+                <a:latin typeface="Microsoft YaHei"/>
+                <a:ea typeface="Microsoft YaHei"/>
+                <a:cs typeface="Microsoft YaHei"/>
+              </a:rPr>
+              <a:t>BOARD</a:t>
+            </a:r>
+            <a:r>
+              <a:rPr sz="1950" b="0">
+                <a:solidFill>
+                  <a:srgbClr val="29263B"/>
+                </a:solidFill>
+                <a:latin typeface="Microsoft YaHei"/>
+                <a:ea typeface="Microsoft YaHei"/>
+                <a:cs typeface="Microsoft YaHei"/>
+              </a:rPr>
+              <a:t> 或生成器选择。</a:t>
             </a:r>
           </a:p>
         </p:txBody>
@@ -32697,13 +33817,35 @@
             <a:r>
               <a:rPr sz="1725">
                 <a:solidFill>
-                  <a:srgbClr val="29263B"/>
-                </a:solidFill>
-                <a:latin typeface="Microsoft YaHei"/>
-                <a:ea typeface="Microsoft YaHei"/>
-                <a:cs typeface="Microsoft YaHei"/>
-              </a:rPr>
-              <a:t>west build -d</a:t>
+                  <a:srgbClr val="A02B93"/>
+                </a:solidFill>
+                <a:latin typeface="Microsoft YaHei"/>
+                <a:ea typeface="Microsoft YaHei"/>
+                <a:cs typeface="Microsoft YaHei"/>
+              </a:rPr>
+              <a:t>west</a:t>
+            </a:r>
+            <a:r>
+              <a:rPr sz="1725">
+                <a:solidFill>
+                  <a:srgbClr val="29263B"/>
+                </a:solidFill>
+                <a:latin typeface="Microsoft YaHei"/>
+                <a:ea typeface="Microsoft YaHei"/>
+                <a:cs typeface="Microsoft YaHei"/>
+              </a:rPr>
+              <a:t> build </a:t>
+            </a:r>
+            <a:r>
+              <a:rPr sz="1725">
+                <a:solidFill>
+                  <a:srgbClr val="B84E00"/>
+                </a:solidFill>
+                <a:latin typeface="Microsoft YaHei"/>
+                <a:ea typeface="Microsoft YaHei"/>
+                <a:cs typeface="Microsoft YaHei"/>
+              </a:rPr>
+              <a:t>-d</a:t>
             </a:r>
           </a:p>
         </p:txBody>
@@ -32995,13 +34137,35 @@
             <a:r>
               <a:rPr sz="1725">
                 <a:solidFill>
-                  <a:srgbClr val="29263B"/>
-                </a:solidFill>
-                <a:latin typeface="Microsoft YaHei"/>
-                <a:ea typeface="Microsoft YaHei"/>
-                <a:cs typeface="Microsoft YaHei"/>
-              </a:rPr>
-              <a:t>cmake --build</a:t>
+                  <a:srgbClr val="A02B93"/>
+                </a:solidFill>
+                <a:latin typeface="Microsoft YaHei"/>
+                <a:ea typeface="Microsoft YaHei"/>
+                <a:cs typeface="Microsoft YaHei"/>
+              </a:rPr>
+              <a:t>cmake</a:t>
+            </a:r>
+            <a:r>
+              <a:rPr sz="1725">
+                <a:solidFill>
+                  <a:srgbClr val="29263B"/>
+                </a:solidFill>
+                <a:latin typeface="Microsoft YaHei"/>
+                <a:ea typeface="Microsoft YaHei"/>
+                <a:cs typeface="Microsoft YaHei"/>
+              </a:rPr>
+              <a:t> </a:t>
+            </a:r>
+            <a:r>
+              <a:rPr sz="1725">
+                <a:solidFill>
+                  <a:srgbClr val="B84E00"/>
+                </a:solidFill>
+                <a:latin typeface="Microsoft YaHei"/>
+                <a:ea typeface="Microsoft YaHei"/>
+                <a:cs typeface="Microsoft YaHei"/>
+              </a:rPr>
+              <a:t>--build</a:t>
             </a:r>
           </a:p>
         </p:txBody>
@@ -33071,7 +34235,16 @@
               <a:rPr u="sng">
                 <a:hlinkClick r:id="R3e649a1468834255"/>
               </a:rPr>
-              <a:t>依据：doc/develop/west/build-flash-debug.rst</a:t>
+              <a:t>依据：</a:t>
+            </a:r>
+            <a:r>
+              <a:rPr u="sng">
+                <a:solidFill>
+                  <a:srgbClr val="0070C0"/>
+                </a:solidFill>
+                <a:hlinkClick r:id="R3e649a1468834255"/>
+              </a:rPr>
+              <a:t>doc/develop/west/build-flash-debug.rst</a:t>
             </a:r>
           </a:p>
         </p:txBody>
@@ -33544,13 +34717,46 @@
             <a:r>
               <a:rPr sz="1950" b="0">
                 <a:solidFill>
-                  <a:srgbClr val="29263B"/>
-                </a:solidFill>
-                <a:latin typeface="Microsoft YaHei"/>
-                <a:ea typeface="Microsoft YaHei"/>
-                <a:cs typeface="Microsoft YaHei"/>
-              </a:rPr>
-              <a:t>west 装在 P002 的 .venv 中；新终端激活后复用，不重复安装。</a:t>
+                  <a:srgbClr val="A02B93"/>
+                </a:solidFill>
+                <a:latin typeface="Microsoft YaHei"/>
+                <a:ea typeface="Microsoft YaHei"/>
+                <a:cs typeface="Microsoft YaHei"/>
+              </a:rPr>
+              <a:t>west</a:t>
+            </a:r>
+            <a:r>
+              <a:rPr sz="1950" b="0">
+                <a:solidFill>
+                  <a:srgbClr val="29263B"/>
+                </a:solidFill>
+                <a:latin typeface="Microsoft YaHei"/>
+                <a:ea typeface="Microsoft YaHei"/>
+                <a:cs typeface="Microsoft YaHei"/>
+              </a:rPr>
+              <a:t> 装在 P002 的 </a:t>
+            </a:r>
+            <a:r>
+              <a:rPr sz="1950" b="0">
+                <a:solidFill>
+                  <a:srgbClr val="0070C0"/>
+                </a:solidFill>
+                <a:latin typeface="Microsoft YaHei"/>
+                <a:ea typeface="Microsoft YaHei"/>
+                <a:cs typeface="Microsoft YaHei"/>
+              </a:rPr>
+              <a:t>.venv</a:t>
+            </a:r>
+            <a:r>
+              <a:rPr sz="1950" b="0">
+                <a:solidFill>
+                  <a:srgbClr val="29263B"/>
+                </a:solidFill>
+                <a:latin typeface="Microsoft YaHei"/>
+                <a:ea typeface="Microsoft YaHei"/>
+                <a:cs typeface="Microsoft YaHei"/>
+              </a:rPr>
+              <a:t> 中；新终端激活后复用，不重复安装。</a:t>
             </a:r>
           </a:p>
           <a:p>
@@ -33634,13 +34840,46 @@
             <a:r>
               <a:rPr sz="1950" b="0">
                 <a:solidFill>
-                  <a:srgbClr val="29263B"/>
-                </a:solidFill>
-                <a:latin typeface="Microsoft YaHei"/>
-                <a:ea typeface="Microsoft YaHei"/>
-                <a:cs typeface="Microsoft YaHei"/>
-              </a:rPr>
-              <a:t>west --version 成功不代表 SDK、模块和扩展都已经准备好。</a:t>
+                  <a:srgbClr val="A02B93"/>
+                </a:solidFill>
+                <a:latin typeface="Microsoft YaHei"/>
+                <a:ea typeface="Microsoft YaHei"/>
+                <a:cs typeface="Microsoft YaHei"/>
+              </a:rPr>
+              <a:t>west</a:t>
+            </a:r>
+            <a:r>
+              <a:rPr sz="1950" b="0">
+                <a:solidFill>
+                  <a:srgbClr val="29263B"/>
+                </a:solidFill>
+                <a:latin typeface="Microsoft YaHei"/>
+                <a:ea typeface="Microsoft YaHei"/>
+                <a:cs typeface="Microsoft YaHei"/>
+              </a:rPr>
+              <a:t> </a:t>
+            </a:r>
+            <a:r>
+              <a:rPr sz="1950" b="0">
+                <a:solidFill>
+                  <a:srgbClr val="B84E00"/>
+                </a:solidFill>
+                <a:latin typeface="Microsoft YaHei"/>
+                <a:ea typeface="Microsoft YaHei"/>
+                <a:cs typeface="Microsoft YaHei"/>
+              </a:rPr>
+              <a:t>--version</a:t>
+            </a:r>
+            <a:r>
+              <a:rPr sz="1950" b="0">
+                <a:solidFill>
+                  <a:srgbClr val="29263B"/>
+                </a:solidFill>
+                <a:latin typeface="Microsoft YaHei"/>
+                <a:ea typeface="Microsoft YaHei"/>
+                <a:cs typeface="Microsoft YaHei"/>
+              </a:rPr>
+              <a:t> 成功不代表 SDK、模块和扩展都已经准备好。</a:t>
             </a:r>
           </a:p>
         </p:txBody>
@@ -33710,7 +34949,16 @@
               <a:rPr u="sng">
                 <a:hlinkClick r:id="Rc8cdcd61dc6241b5"/>
               </a:rPr>
-              <a:t>依据：doc/develop/west/basics.rst</a:t>
+              <a:t>依据：</a:t>
+            </a:r>
+            <a:r>
+              <a:rPr u="sng">
+                <a:solidFill>
+                  <a:srgbClr val="0070C0"/>
+                </a:solidFill>
+                <a:hlinkClick r:id="Rc8cdcd61dc6241b5"/>
+              </a:rPr>
+              <a:t>doc/develop/west/basics.rst</a:t>
             </a:r>
           </a:p>
         </p:txBody>
@@ -34113,13 +35361,46 @@
             <a:r>
               <a:rPr sz="1950" b="0">
                 <a:solidFill>
-                  <a:srgbClr val="29263B"/>
-                </a:solidFill>
-                <a:latin typeface="Microsoft YaHei"/>
-                <a:ea typeface="Microsoft YaHei"/>
-                <a:cs typeface="Microsoft YaHei"/>
-              </a:rPr>
-              <a:t>-c：强制重跑 CMake，保留缓存；加 --cmake-only 才只配置。</a:t>
+                  <a:srgbClr val="B84E00"/>
+                </a:solidFill>
+                <a:latin typeface="Microsoft YaHei"/>
+                <a:ea typeface="Microsoft YaHei"/>
+                <a:cs typeface="Microsoft YaHei"/>
+              </a:rPr>
+              <a:t>-c</a:t>
+            </a:r>
+            <a:r>
+              <a:rPr sz="1950" b="0">
+                <a:solidFill>
+                  <a:srgbClr val="29263B"/>
+                </a:solidFill>
+                <a:latin typeface="Microsoft YaHei"/>
+                <a:ea typeface="Microsoft YaHei"/>
+                <a:cs typeface="Microsoft YaHei"/>
+              </a:rPr>
+              <a:t>：强制重跑 CMake，保留缓存；加 </a:t>
+            </a:r>
+            <a:r>
+              <a:rPr sz="1950" b="0">
+                <a:solidFill>
+                  <a:srgbClr val="B84E00"/>
+                </a:solidFill>
+                <a:latin typeface="Microsoft YaHei"/>
+                <a:ea typeface="Microsoft YaHei"/>
+                <a:cs typeface="Microsoft YaHei"/>
+              </a:rPr>
+              <a:t>--cmake-only</a:t>
+            </a:r>
+            <a:r>
+              <a:rPr sz="1950" b="0">
+                <a:solidFill>
+                  <a:srgbClr val="29263B"/>
+                </a:solidFill>
+                <a:latin typeface="Microsoft YaHei"/>
+                <a:ea typeface="Microsoft YaHei"/>
+                <a:cs typeface="Microsoft YaHei"/>
+              </a:rPr>
+              <a:t> 才只配置。</a:t>
             </a:r>
           </a:p>
           <a:p>
@@ -34149,7 +35430,29 @@
                 <a:ea typeface="Microsoft YaHei"/>
                 <a:cs typeface="Microsoft YaHei"/>
               </a:rPr>
-              <a:t>-- -D名字=值：给 CMake 配置阶段，值可能写入缓存。</a:t>
+              <a:t>-- </a:t>
+            </a:r>
+            <a:r>
+              <a:rPr sz="1950" b="0">
+                <a:solidFill>
+                  <a:srgbClr val="B84E00"/>
+                </a:solidFill>
+                <a:latin typeface="Microsoft YaHei"/>
+                <a:ea typeface="Microsoft YaHei"/>
+                <a:cs typeface="Microsoft YaHei"/>
+              </a:rPr>
+              <a:t>-D名字</a:t>
+            </a:r>
+            <a:r>
+              <a:rPr sz="1950" b="0">
+                <a:solidFill>
+                  <a:srgbClr val="29263B"/>
+                </a:solidFill>
+                <a:latin typeface="Microsoft YaHei"/>
+                <a:ea typeface="Microsoft YaHei"/>
+                <a:cs typeface="Microsoft YaHei"/>
+              </a:rPr>
+              <a:t>=值：给 CMake 配置阶段，值可能写入缓存。</a:t>
             </a:r>
           </a:p>
           <a:p>
@@ -34173,13 +35476,68 @@
             <a:r>
               <a:rPr sz="1950" b="0">
                 <a:solidFill>
-                  <a:srgbClr val="29263B"/>
-                </a:solidFill>
-                <a:latin typeface="Microsoft YaHei"/>
-                <a:ea typeface="Microsoft YaHei"/>
-                <a:cs typeface="Microsoft YaHei"/>
-              </a:rPr>
-              <a:t>-t help：后端目标；-o=-j4：把并行选项交给 Ninja。</a:t>
+                  <a:srgbClr val="B84E00"/>
+                </a:solidFill>
+                <a:latin typeface="Microsoft YaHei"/>
+                <a:ea typeface="Microsoft YaHei"/>
+                <a:cs typeface="Microsoft YaHei"/>
+              </a:rPr>
+              <a:t>-t</a:t>
+            </a:r>
+            <a:r>
+              <a:rPr sz="1950" b="0">
+                <a:solidFill>
+                  <a:srgbClr val="29263B"/>
+                </a:solidFill>
+                <a:latin typeface="Microsoft YaHei"/>
+                <a:ea typeface="Microsoft YaHei"/>
+                <a:cs typeface="Microsoft YaHei"/>
+              </a:rPr>
+              <a:t> help：后端目标；</a:t>
+            </a:r>
+            <a:r>
+              <a:rPr sz="1950" b="0">
+                <a:solidFill>
+                  <a:srgbClr val="B84E00"/>
+                </a:solidFill>
+                <a:latin typeface="Microsoft YaHei"/>
+                <a:ea typeface="Microsoft YaHei"/>
+                <a:cs typeface="Microsoft YaHei"/>
+              </a:rPr>
+              <a:t>-o</a:t>
+            </a:r>
+            <a:r>
+              <a:rPr sz="1950" b="0">
+                <a:solidFill>
+                  <a:srgbClr val="29263B"/>
+                </a:solidFill>
+                <a:latin typeface="Microsoft YaHei"/>
+                <a:ea typeface="Microsoft YaHei"/>
+                <a:cs typeface="Microsoft YaHei"/>
+              </a:rPr>
+              <a:t>=</a:t>
+            </a:r>
+            <a:r>
+              <a:rPr sz="1950" b="0">
+                <a:solidFill>
+                  <a:srgbClr val="B84E00"/>
+                </a:solidFill>
+                <a:latin typeface="Microsoft YaHei"/>
+                <a:ea typeface="Microsoft YaHei"/>
+                <a:cs typeface="Microsoft YaHei"/>
+              </a:rPr>
+              <a:t>-j4</a:t>
+            </a:r>
+            <a:r>
+              <a:rPr sz="1950" b="0">
+                <a:solidFill>
+                  <a:srgbClr val="29263B"/>
+                </a:solidFill>
+                <a:latin typeface="Microsoft YaHei"/>
+                <a:ea typeface="Microsoft YaHei"/>
+                <a:cs typeface="Microsoft YaHei"/>
+              </a:rPr>
+              <a:t>：把并行选项交给 Ninja。</a:t>
             </a:r>
           </a:p>
           <a:p>
@@ -34209,7 +35567,29 @@
                 <a:ea typeface="Microsoft YaHei"/>
                 <a:cs typeface="Microsoft YaHei"/>
               </a:rPr>
-              <a:t>不要把 BOARD 交给 Ninja；它由 Zephyr 的配置脚本解释。</a:t>
+              <a:t>不要把 </a:t>
+            </a:r>
+            <a:r>
+              <a:rPr sz="1950" b="0">
+                <a:solidFill>
+                  <a:srgbClr val="B84E00"/>
+                </a:solidFill>
+                <a:latin typeface="Microsoft YaHei"/>
+                <a:ea typeface="Microsoft YaHei"/>
+                <a:cs typeface="Microsoft YaHei"/>
+              </a:rPr>
+              <a:t>BOARD</a:t>
+            </a:r>
+            <a:r>
+              <a:rPr sz="1950" b="0">
+                <a:solidFill>
+                  <a:srgbClr val="29263B"/>
+                </a:solidFill>
+                <a:latin typeface="Microsoft YaHei"/>
+                <a:ea typeface="Microsoft YaHei"/>
+                <a:cs typeface="Microsoft YaHei"/>
+              </a:rPr>
+              <a:t> 交给 Ninja；它由 Zephyr 的配置脚本解释。</a:t>
             </a:r>
           </a:p>
         </p:txBody>
@@ -34279,7 +35659,16 @@
               <a:rPr u="sng">
                 <a:hlinkClick r:id="R86bed5304f6c4784"/>
               </a:rPr>
-              <a:t>依据：doc/develop/west/build-flash-debug.rst</a:t>
+              <a:t>依据：</a:t>
+            </a:r>
+            <a:r>
+              <a:rPr u="sng">
+                <a:solidFill>
+                  <a:srgbClr val="0070C0"/>
+                </a:solidFill>
+                <a:hlinkClick r:id="R86bed5304f6c4784"/>
+              </a:rPr>
+              <a:t>doc/develop/west/build-flash-debug.rst</a:t>
             </a:r>
           </a:p>
         </p:txBody>
@@ -34752,13 +36141,46 @@
             <a:r>
               <a:rPr sz="1950" b="0">
                 <a:solidFill>
-                  <a:srgbClr val="29263B"/>
-                </a:solidFill>
-                <a:latin typeface="Microsoft YaHei"/>
-                <a:ea typeface="Microsoft YaHei"/>
-                <a:cs typeface="Microsoft YaHei"/>
-              </a:rPr>
-              <a:t>.west/config：west 工作区及扩展选项。</a:t>
+                  <a:srgbClr val="0070C0"/>
+                </a:solidFill>
+                <a:latin typeface="Microsoft YaHei"/>
+                <a:ea typeface="Microsoft YaHei"/>
+                <a:cs typeface="Microsoft YaHei"/>
+              </a:rPr>
+              <a:t>.west/config</a:t>
+            </a:r>
+            <a:r>
+              <a:rPr sz="1950" b="0">
+                <a:solidFill>
+                  <a:srgbClr val="29263B"/>
+                </a:solidFill>
+                <a:latin typeface="Microsoft YaHei"/>
+                <a:ea typeface="Microsoft YaHei"/>
+                <a:cs typeface="Microsoft YaHei"/>
+              </a:rPr>
+              <a:t>：</a:t>
+            </a:r>
+            <a:r>
+              <a:rPr sz="1950" b="0">
+                <a:solidFill>
+                  <a:srgbClr val="A02B93"/>
+                </a:solidFill>
+                <a:latin typeface="Microsoft YaHei"/>
+                <a:ea typeface="Microsoft YaHei"/>
+                <a:cs typeface="Microsoft YaHei"/>
+              </a:rPr>
+              <a:t>west</a:t>
+            </a:r>
+            <a:r>
+              <a:rPr sz="1950" b="0">
+                <a:solidFill>
+                  <a:srgbClr val="29263B"/>
+                </a:solidFill>
+                <a:latin typeface="Microsoft YaHei"/>
+                <a:ea typeface="Microsoft YaHei"/>
+                <a:cs typeface="Microsoft YaHei"/>
+              </a:rPr>
+              <a:t> 工作区及扩展选项。</a:t>
             </a:r>
           </a:p>
           <a:p>
@@ -34782,13 +36204,24 @@
             <a:r>
               <a:rPr sz="1950" b="0">
                 <a:solidFill>
-                  <a:srgbClr val="29263B"/>
-                </a:solidFill>
-                <a:latin typeface="Microsoft YaHei"/>
-                <a:ea typeface="Microsoft YaHei"/>
-                <a:cs typeface="Microsoft YaHei"/>
-              </a:rPr>
-              <a:t>CMakeCache.txt：一份构建目录保存的配置。</a:t>
+                  <a:srgbClr val="0070C0"/>
+                </a:solidFill>
+                <a:latin typeface="Microsoft YaHei"/>
+                <a:ea typeface="Microsoft YaHei"/>
+                <a:cs typeface="Microsoft YaHei"/>
+              </a:rPr>
+              <a:t>CMakeCache.txt</a:t>
+            </a:r>
+            <a:r>
+              <a:rPr sz="1950" b="0">
+                <a:solidFill>
+                  <a:srgbClr val="29263B"/>
+                </a:solidFill>
+                <a:latin typeface="Microsoft YaHei"/>
+                <a:ea typeface="Microsoft YaHei"/>
+                <a:cs typeface="Microsoft YaHei"/>
+              </a:rPr>
+              <a:t>：一份构建目录保存的配置。</a:t>
             </a:r>
           </a:p>
           <a:p>
@@ -34812,13 +36245,46 @@
             <a:r>
               <a:rPr sz="1950" b="0">
                 <a:solidFill>
-                  <a:srgbClr val="29263B"/>
-                </a:solidFill>
-                <a:latin typeface="Microsoft YaHei"/>
-                <a:ea typeface="Microsoft YaHei"/>
-                <a:cs typeface="Microsoft YaHei"/>
-              </a:rPr>
-              <a:t>.venv：Python 包和入口；不保存 BOARD 或 SDK 包注册表。</a:t>
+                  <a:srgbClr val="0070C0"/>
+                </a:solidFill>
+                <a:latin typeface="Microsoft YaHei"/>
+                <a:ea typeface="Microsoft YaHei"/>
+                <a:cs typeface="Microsoft YaHei"/>
+              </a:rPr>
+              <a:t>.venv</a:t>
+            </a:r>
+            <a:r>
+              <a:rPr sz="1950" b="0">
+                <a:solidFill>
+                  <a:srgbClr val="29263B"/>
+                </a:solidFill>
+                <a:latin typeface="Microsoft YaHei"/>
+                <a:ea typeface="Microsoft YaHei"/>
+                <a:cs typeface="Microsoft YaHei"/>
+              </a:rPr>
+              <a:t>：Python 包和入口；不保存 </a:t>
+            </a:r>
+            <a:r>
+              <a:rPr sz="1950" b="0">
+                <a:solidFill>
+                  <a:srgbClr val="B84E00"/>
+                </a:solidFill>
+                <a:latin typeface="Microsoft YaHei"/>
+                <a:ea typeface="Microsoft YaHei"/>
+                <a:cs typeface="Microsoft YaHei"/>
+              </a:rPr>
+              <a:t>BOARD</a:t>
+            </a:r>
+            <a:r>
+              <a:rPr sz="1950" b="0">
+                <a:solidFill>
+                  <a:srgbClr val="29263B"/>
+                </a:solidFill>
+                <a:latin typeface="Microsoft YaHei"/>
+                <a:ea typeface="Microsoft YaHei"/>
+                <a:cs typeface="Microsoft YaHei"/>
+              </a:rPr>
+              <a:t> 或 SDK 包注册表。</a:t>
             </a:r>
           </a:p>
           <a:p>
@@ -34848,7 +36314,51 @@
                 <a:ea typeface="Microsoft YaHei"/>
                 <a:cs typeface="Microsoft YaHei"/>
               </a:rPr>
-              <a:t>新 -d 是独立配置；-p always 会清空所选构建状态，不是日常必做。</a:t>
+              <a:t>新 </a:t>
+            </a:r>
+            <a:r>
+              <a:rPr sz="1950" b="0">
+                <a:solidFill>
+                  <a:srgbClr val="B84E00"/>
+                </a:solidFill>
+                <a:latin typeface="Microsoft YaHei"/>
+                <a:ea typeface="Microsoft YaHei"/>
+                <a:cs typeface="Microsoft YaHei"/>
+              </a:rPr>
+              <a:t>-d</a:t>
+            </a:r>
+            <a:r>
+              <a:rPr sz="1950" b="0">
+                <a:solidFill>
+                  <a:srgbClr val="29263B"/>
+                </a:solidFill>
+                <a:latin typeface="Microsoft YaHei"/>
+                <a:ea typeface="Microsoft YaHei"/>
+                <a:cs typeface="Microsoft YaHei"/>
+              </a:rPr>
+              <a:t> 是独立配置；</a:t>
+            </a:r>
+            <a:r>
+              <a:rPr sz="1950" b="0">
+                <a:solidFill>
+                  <a:srgbClr val="B84E00"/>
+                </a:solidFill>
+                <a:latin typeface="Microsoft YaHei"/>
+                <a:ea typeface="Microsoft YaHei"/>
+                <a:cs typeface="Microsoft YaHei"/>
+              </a:rPr>
+              <a:t>-p</a:t>
+            </a:r>
+            <a:r>
+              <a:rPr sz="1950" b="0">
+                <a:solidFill>
+                  <a:srgbClr val="29263B"/>
+                </a:solidFill>
+                <a:latin typeface="Microsoft YaHei"/>
+                <a:ea typeface="Microsoft YaHei"/>
+                <a:cs typeface="Microsoft YaHei"/>
+              </a:rPr>
+              <a:t> always 会清空所选构建状态，不是日常必做。</a:t>
             </a:r>
           </a:p>
         </p:txBody>
@@ -34916,13 +36426,24 @@
             <a:r>
               <a:rPr sz="1725">
                 <a:solidFill>
-                  <a:srgbClr val="29263B"/>
-                </a:solidFill>
-                <a:latin typeface="Microsoft YaHei"/>
-                <a:ea typeface="Microsoft YaHei"/>
-                <a:cs typeface="Microsoft YaHei"/>
-              </a:rPr>
-              <a:t>west 配置</a:t>
+                  <a:srgbClr val="A02B93"/>
+                </a:solidFill>
+                <a:latin typeface="Microsoft YaHei"/>
+                <a:ea typeface="Microsoft YaHei"/>
+                <a:cs typeface="Microsoft YaHei"/>
+              </a:rPr>
+              <a:t>west</a:t>
+            </a:r>
+            <a:r>
+              <a:rPr sz="1725">
+                <a:solidFill>
+                  <a:srgbClr val="29263B"/>
+                </a:solidFill>
+                <a:latin typeface="Microsoft YaHei"/>
+                <a:ea typeface="Microsoft YaHei"/>
+                <a:cs typeface="Microsoft YaHei"/>
+              </a:rPr>
+              <a:t> 配置</a:t>
             </a:r>
           </a:p>
         </p:txBody>
@@ -35140,7 +36661,16 @@
               <a:rPr u="sng">
                 <a:hlinkClick r:id="Rc2daeb10a60443dd"/>
               </a:rPr>
-              <a:t>依据：doc/develop/west/build-flash-debug.rst</a:t>
+              <a:t>依据：</a:t>
+            </a:r>
+            <a:r>
+              <a:rPr u="sng">
+                <a:solidFill>
+                  <a:srgbClr val="0070C0"/>
+                </a:solidFill>
+                <a:hlinkClick r:id="Rc2daeb10a60443dd"/>
+              </a:rPr>
+              <a:t>doc/develop/west/build-flash-debug.rst</a:t>
             </a:r>
           </a:p>
         </p:txBody>
@@ -35543,13 +37073,24 @@
             <a:r>
               <a:rPr sz="1950" b="0">
                 <a:solidFill>
-                  <a:srgbClr val="29263B"/>
-                </a:solidFill>
-                <a:latin typeface="Microsoft YaHei"/>
-                <a:ea typeface="Microsoft YaHei"/>
-                <a:cs typeface="Microsoft YaHei"/>
-              </a:rPr>
-              <a:t>west zephyr-export 注册 Zephyr 源码的 CMake 包。</a:t>
+                  <a:srgbClr val="A02B93"/>
+                </a:solidFill>
+                <a:latin typeface="Microsoft YaHei"/>
+                <a:ea typeface="Microsoft YaHei"/>
+                <a:cs typeface="Microsoft YaHei"/>
+              </a:rPr>
+              <a:t>west</a:t>
+            </a:r>
+            <a:r>
+              <a:rPr sz="1950" b="0">
+                <a:solidFill>
+                  <a:srgbClr val="29263B"/>
+                </a:solidFill>
+                <a:latin typeface="Microsoft YaHei"/>
+                <a:ea typeface="Microsoft YaHei"/>
+                <a:cs typeface="Microsoft YaHei"/>
+              </a:rPr>
+              <a:t> zephyr-export 注册 Zephyr 源码的 CMake 包。</a:t>
             </a:r>
           </a:p>
           <a:p>
@@ -35579,7 +37120,29 @@
                 <a:ea typeface="Microsoft YaHei"/>
                 <a:cs typeface="Microsoft YaHei"/>
               </a:rPr>
-              <a:t>SDK setup.cmd /c 注册 SDK 自己的 CMake 包。</a:t>
+              <a:t>SDK </a:t>
+            </a:r>
+            <a:r>
+              <a:rPr sz="1950" b="0">
+                <a:solidFill>
+                  <a:srgbClr val="0070C0"/>
+                </a:solidFill>
+                <a:latin typeface="Microsoft YaHei"/>
+                <a:ea typeface="Microsoft YaHei"/>
+                <a:cs typeface="Microsoft YaHei"/>
+              </a:rPr>
+              <a:t>setup.cmd</a:t>
+            </a:r>
+            <a:r>
+              <a:rPr sz="1950" b="0">
+                <a:solidFill>
+                  <a:srgbClr val="29263B"/>
+                </a:solidFill>
+                <a:latin typeface="Microsoft YaHei"/>
+                <a:ea typeface="Microsoft YaHei"/>
+                <a:cs typeface="Microsoft YaHei"/>
+              </a:rPr>
+              <a:t> /c 注册 SDK 自己的 CMake 包。</a:t>
             </a:r>
           </a:p>
           <a:p>
@@ -35609,7 +37172,51 @@
                 <a:ea typeface="Microsoft YaHei"/>
                 <a:cs typeface="Microsoft YaHei"/>
               </a:rPr>
-              <a:t>本例显式给了 Zephyr_DIR，无须再重复 export。</a:t>
+              <a:t>本例显式给了 </a:t>
+            </a:r>
+            <a:r>
+              <a:rPr sz="1950" b="0">
+                <a:solidFill>
+                  <a:srgbClr val="B84E00"/>
+                </a:solidFill>
+                <a:latin typeface="Microsoft YaHei"/>
+                <a:ea typeface="Microsoft YaHei"/>
+                <a:cs typeface="Microsoft YaHei"/>
+              </a:rPr>
+              <a:t>Zephyr_DIR</a:t>
+            </a:r>
+            <a:r>
+              <a:rPr sz="1950" b="0">
+                <a:solidFill>
+                  <a:srgbClr val="29263B"/>
+                </a:solidFill>
+                <a:latin typeface="Microsoft YaHei"/>
+                <a:ea typeface="Microsoft YaHei"/>
+                <a:cs typeface="Microsoft YaHei"/>
+              </a:rPr>
+              <a:t>，无须再重复 </a:t>
+            </a:r>
+            <a:r>
+              <a:rPr sz="1950" b="0">
+                <a:solidFill>
+                  <a:srgbClr val="A02B93"/>
+                </a:solidFill>
+                <a:latin typeface="Microsoft YaHei"/>
+                <a:ea typeface="Microsoft YaHei"/>
+                <a:cs typeface="Microsoft YaHei"/>
+              </a:rPr>
+              <a:t>export</a:t>
+            </a:r>
+            <a:r>
+              <a:rPr sz="1950" b="0">
+                <a:solidFill>
+                  <a:srgbClr val="29263B"/>
+                </a:solidFill>
+                <a:latin typeface="Microsoft YaHei"/>
+                <a:ea typeface="Microsoft YaHei"/>
+                <a:cs typeface="Microsoft YaHei"/>
+              </a:rPr>
+              <a:t>。</a:t>
             </a:r>
           </a:p>
           <a:p>
@@ -35709,7 +37316,16 @@
               <a:rPr u="sng">
                 <a:hlinkClick r:id="Rbe9868c3e3f3460d"/>
               </a:rPr>
-              <a:t>依据：doc/develop/west/build-flash-debug.rst</a:t>
+              <a:t>依据：</a:t>
+            </a:r>
+            <a:r>
+              <a:rPr u="sng">
+                <a:solidFill>
+                  <a:srgbClr val="0070C0"/>
+                </a:solidFill>
+                <a:hlinkClick r:id="Rbe9868c3e3f3460d"/>
+              </a:rPr>
+              <a:t>doc/develop/west/build-flash-debug.rst</a:t>
             </a:r>
           </a:p>
         </p:txBody>
@@ -36118,7 +37734,29 @@
                 <a:ea typeface="Microsoft YaHei"/>
                 <a:cs typeface="Microsoft YaHei"/>
               </a:rPr>
-              <a:t>找不到 west → Python / venv；找不到 build → 清单与扩展。</a:t>
+              <a:t>找不到 </a:t>
+            </a:r>
+            <a:r>
+              <a:rPr sz="1950" b="0">
+                <a:solidFill>
+                  <a:srgbClr val="A02B93"/>
+                </a:solidFill>
+                <a:latin typeface="Microsoft YaHei"/>
+                <a:ea typeface="Microsoft YaHei"/>
+                <a:cs typeface="Microsoft YaHei"/>
+              </a:rPr>
+              <a:t>west</a:t>
+            </a:r>
+            <a:r>
+              <a:rPr sz="1950" b="0">
+                <a:solidFill>
+                  <a:srgbClr val="29263B"/>
+                </a:solidFill>
+                <a:latin typeface="Microsoft YaHei"/>
+                <a:ea typeface="Microsoft YaHei"/>
+                <a:cs typeface="Microsoft YaHei"/>
+              </a:rPr>
+              <a:t> → Python / venv；找不到 build → 清单与扩展。</a:t>
             </a:r>
           </a:p>
           <a:p>
@@ -36278,7 +37916,16 @@
               <a:rPr u="sng">
                 <a:hlinkClick r:id="Rca2b13e8a631496e"/>
               </a:rPr>
-              <a:t>依据：doc/develop/west/build-flash-debug.rst</a:t>
+              <a:t>依据：</a:t>
+            </a:r>
+            <a:r>
+              <a:rPr u="sng">
+                <a:solidFill>
+                  <a:srgbClr val="0070C0"/>
+                </a:solidFill>
+                <a:hlinkClick r:id="Rca2b13e8a631496e"/>
+              </a:rPr>
+              <a:t>doc/develop/west/build-flash-debug.rst</a:t>
             </a:r>
           </a:p>
         </p:txBody>
@@ -36717,7 +38364,29 @@
                 <a:ea typeface="Microsoft YaHei"/>
                 <a:cs typeface="Microsoft YaHei"/>
               </a:rPr>
-              <a:t>能解释 west 传什么给 CMake，CMake 再调用哪个后端。</a:t>
+              <a:t>能解释 </a:t>
+            </a:r>
+            <a:r>
+              <a:rPr sz="1950" b="0">
+                <a:solidFill>
+                  <a:srgbClr val="A02B93"/>
+                </a:solidFill>
+                <a:latin typeface="Microsoft YaHei"/>
+                <a:ea typeface="Microsoft YaHei"/>
+                <a:cs typeface="Microsoft YaHei"/>
+              </a:rPr>
+              <a:t>west</a:t>
+            </a:r>
+            <a:r>
+              <a:rPr sz="1950" b="0">
+                <a:solidFill>
+                  <a:srgbClr val="29263B"/>
+                </a:solidFill>
+                <a:latin typeface="Microsoft YaHei"/>
+                <a:ea typeface="Microsoft YaHei"/>
+                <a:cs typeface="Microsoft YaHei"/>
+              </a:rPr>
+              <a:t> 传什么给 CMake，CMake 再调用哪个后端。</a:t>
             </a:r>
           </a:p>
           <a:p>
@@ -36777,7 +38446,29 @@
                 <a:ea typeface="Microsoft YaHei"/>
                 <a:cs typeface="Microsoft YaHei"/>
               </a:rPr>
-              <a:t>下一册 P009 深入输入发现；自编清单与扩展去 learning/west。</a:t>
+              <a:t>下一册 P009 深入输入发现；自编清单与扩展去 </a:t>
+            </a:r>
+            <a:r>
+              <a:rPr sz="1950" b="0">
+                <a:solidFill>
+                  <a:srgbClr val="0070C0"/>
+                </a:solidFill>
+                <a:latin typeface="Microsoft YaHei"/>
+                <a:ea typeface="Microsoft YaHei"/>
+                <a:cs typeface="Microsoft YaHei"/>
+              </a:rPr>
+              <a:t>learning/west</a:t>
+            </a:r>
+            <a:r>
+              <a:rPr sz="1950" b="0">
+                <a:solidFill>
+                  <a:srgbClr val="29263B"/>
+                </a:solidFill>
+                <a:latin typeface="Microsoft YaHei"/>
+                <a:ea typeface="Microsoft YaHei"/>
+                <a:cs typeface="Microsoft YaHei"/>
+              </a:rPr>
+              <a:t>。</a:t>
             </a:r>
           </a:p>
         </p:txBody>
@@ -36847,7 +38538,16 @@
               <a:rPr u="sng">
                 <a:hlinkClick r:id="R49279acf272f490d"/>
               </a:rPr>
-              <a:t>依据：doc/develop/west/build-flash-debug.rst</a:t>
+              <a:t>依据：</a:t>
+            </a:r>
+            <a:r>
+              <a:rPr u="sng">
+                <a:solidFill>
+                  <a:srgbClr val="0070C0"/>
+                </a:solidFill>
+                <a:hlinkClick r:id="R49279acf272f490d"/>
+              </a:rPr>
+              <a:t>doc/develop/west/build-flash-debug.rst</a:t>
             </a:r>
           </a:p>
         </p:txBody>
@@ -37250,7 +38950,7 @@
             <a:r>
               <a:rPr sz="1725" b="0">
                 <a:solidFill>
-                  <a:srgbClr val="29263B"/>
+                  <a:srgbClr val="646173"/>
                 </a:solidFill>
                 <a:latin typeface="Consolas"/>
                 <a:ea typeface="Consolas"/>
@@ -37340,72 +39040,56 @@
                 <a:ea typeface="Consolas"/>
                 <a:cs typeface="Consolas"/>
               </a:rPr>
-              <a:t> .venv</a:t>
-            </a:r>
-            <a:r>
-              <a:rPr>
+              <a:t> </a:t>
+            </a:r>
+            <a:r>
+              <a:rPr sz="1725" b="0">
                 <a:solidFill>
                   <a:srgbClr val="0070C0"/>
-                </a:solidFill>
-              </a:rPr>
-              <a:t>/Scripts/activate</a:t>
-            </a:r>
-          </a:p>
-          <a:p>
-            <a:pPr>
-              <a:lnSpc>
-                <a:spcPct val="120000"/>
-              </a:lnSpc>
-              <a:spcAft>
-                <a:spcPts val="0"/>
-              </a:spcAft>
-              <a:buNone/>
-              <a:defRPr sz="1725" b="0">
-                <a:solidFill>
-                  <a:srgbClr val="29263B"/>
                 </a:solidFill>
                 <a:latin typeface="Consolas"/>
                 <a:ea typeface="Consolas"/>
                 <a:cs typeface="Consolas"/>
-              </a:defRPr>
-            </a:pPr>
-            <a:r>
-              <a:rPr sz="1725" b="0">
+              </a:rPr>
+              <a:t>.venv</a:t>
+            </a:r>
+            <a:r>
+              <a:rPr>
+                <a:solidFill>
+                  <a:srgbClr val="0070C0"/>
+                </a:solidFill>
+              </a:rPr>
+              <a:t>/Scripts/activate</a:t>
+            </a:r>
+          </a:p>
+          <a:p>
+            <a:pPr>
+              <a:lnSpc>
+                <a:spcPct val="120000"/>
+              </a:lnSpc>
+              <a:spcAft>
+                <a:spcPts val="0"/>
+              </a:spcAft>
+              <a:buNone/>
+              <a:defRPr sz="1725" b="0">
                 <a:solidFill>
                   <a:srgbClr val="29263B"/>
                 </a:solidFill>
                 <a:latin typeface="Consolas"/>
                 <a:ea typeface="Consolas"/>
                 <a:cs typeface="Consolas"/>
-              </a:rPr>
-              <a:t>python --version</a:t>
-            </a:r>
-          </a:p>
-          <a:p>
-            <a:pPr>
-              <a:lnSpc>
-                <a:spcPct val="120000"/>
-              </a:lnSpc>
-              <a:spcAft>
-                <a:spcPts val="0"/>
-              </a:spcAft>
-              <a:buNone/>
-              <a:defRPr sz="1725" b="0">
-                <a:solidFill>
-                  <a:srgbClr val="29263B"/>
+              </a:defRPr>
+            </a:pPr>
+            <a:r>
+              <a:rPr sz="1725" b="0">
+                <a:solidFill>
+                  <a:srgbClr val="A02B93"/>
                 </a:solidFill>
                 <a:latin typeface="Consolas"/>
                 <a:ea typeface="Consolas"/>
                 <a:cs typeface="Consolas"/>
-              </a:defRPr>
-            </a:pPr>
-            <a:r>
-              <a:rPr>
-                <a:solidFill>
-                  <a:srgbClr val="A02B93"/>
-                </a:solidFill>
-              </a:rPr>
-              <a:t>west</a:t>
+              </a:rPr>
+              <a:t>python</a:t>
             </a:r>
             <a:r>
               <a:rPr sz="1725" b="0">
@@ -37416,45 +39100,116 @@
                 <a:ea typeface="Consolas"/>
                 <a:cs typeface="Consolas"/>
               </a:rPr>
-              <a:t> --version</a:t>
-            </a:r>
-          </a:p>
-          <a:p>
-            <a:pPr>
-              <a:lnSpc>
-                <a:spcPct val="120000"/>
-              </a:lnSpc>
-              <a:spcAft>
-                <a:spcPts val="0"/>
-              </a:spcAft>
-              <a:buNone/>
-              <a:defRPr sz="1725" b="0">
-                <a:solidFill>
-                  <a:srgbClr val="29263B"/>
+              <a:t> </a:t>
+            </a:r>
+            <a:r>
+              <a:rPr sz="1725" b="0">
+                <a:solidFill>
+                  <a:srgbClr val="B84E00"/>
                 </a:solidFill>
                 <a:latin typeface="Consolas"/>
                 <a:ea typeface="Consolas"/>
                 <a:cs typeface="Consolas"/>
-              </a:defRPr>
-            </a:pPr>
-            <a:r>
-              <a:rPr>
-                <a:solidFill>
-                  <a:srgbClr val="A02B93"/>
-                </a:solidFill>
-              </a:rPr>
-              <a:t>west</a:t>
-            </a:r>
-            <a:r>
-              <a:rPr sz="1725" b="0">
+              </a:rPr>
+              <a:t>--version</a:t>
+            </a:r>
+          </a:p>
+          <a:p>
+            <a:pPr>
+              <a:lnSpc>
+                <a:spcPct val="120000"/>
+              </a:lnSpc>
+              <a:spcAft>
+                <a:spcPts val="0"/>
+              </a:spcAft>
+              <a:buNone/>
+              <a:defRPr sz="1725" b="0">
                 <a:solidFill>
                   <a:srgbClr val="29263B"/>
                 </a:solidFill>
                 <a:latin typeface="Consolas"/>
                 <a:ea typeface="Consolas"/>
                 <a:cs typeface="Consolas"/>
-              </a:rPr>
-              <a:t> --help</a:t>
+              </a:defRPr>
+            </a:pPr>
+            <a:r>
+              <a:rPr>
+                <a:solidFill>
+                  <a:srgbClr val="A02B93"/>
+                </a:solidFill>
+              </a:rPr>
+              <a:t>west</a:t>
+            </a:r>
+            <a:r>
+              <a:rPr sz="1725" b="0">
+                <a:solidFill>
+                  <a:srgbClr val="29263B"/>
+                </a:solidFill>
+                <a:latin typeface="Consolas"/>
+                <a:ea typeface="Consolas"/>
+                <a:cs typeface="Consolas"/>
+              </a:rPr>
+              <a:t> </a:t>
+            </a:r>
+            <a:r>
+              <a:rPr sz="1725" b="0">
+                <a:solidFill>
+                  <a:srgbClr val="B84E00"/>
+                </a:solidFill>
+                <a:latin typeface="Consolas"/>
+                <a:ea typeface="Consolas"/>
+                <a:cs typeface="Consolas"/>
+              </a:rPr>
+              <a:t>--version</a:t>
+            </a:r>
+          </a:p>
+          <a:p>
+            <a:pPr>
+              <a:lnSpc>
+                <a:spcPct val="120000"/>
+              </a:lnSpc>
+              <a:spcAft>
+                <a:spcPts val="0"/>
+              </a:spcAft>
+              <a:buNone/>
+              <a:defRPr sz="1725" b="0">
+                <a:solidFill>
+                  <a:srgbClr val="29263B"/>
+                </a:solidFill>
+                <a:latin typeface="Consolas"/>
+                <a:ea typeface="Consolas"/>
+                <a:cs typeface="Consolas"/>
+              </a:defRPr>
+            </a:pPr>
+            <a:r>
+              <a:rPr>
+                <a:solidFill>
+                  <a:srgbClr val="A02B93"/>
+                </a:solidFill>
+              </a:rPr>
+              <a:t>west</a:t>
+            </a:r>
+            <a:r>
+              <a:rPr sz="1725" b="0">
+                <a:solidFill>
+                  <a:srgbClr val="29263B"/>
+                </a:solidFill>
+                <a:latin typeface="Consolas"/>
+                <a:ea typeface="Consolas"/>
+                <a:cs typeface="Consolas"/>
+              </a:rPr>
+              <a:t> </a:t>
+            </a:r>
+            <a:r>
+              <a:rPr sz="1725" b="0">
+                <a:solidFill>
+                  <a:srgbClr val="B84E00"/>
+                </a:solidFill>
+                <a:latin typeface="Consolas"/>
+                <a:ea typeface="Consolas"/>
+                <a:cs typeface="Consolas"/>
+              </a:rPr>
+              <a:t>--help</a:t>
             </a:r>
           </a:p>
         </p:txBody>
@@ -37529,7 +39284,29 @@
                 <a:ea typeface="Microsoft YaHei"/>
                 <a:cs typeface="Microsoft YaHei"/>
               </a:rPr>
-              <a:t>预期 Python 3.12.10、west 1.5.0。</a:t>
+              <a:t>预期 Python 3.12.10、</a:t>
+            </a:r>
+            <a:r>
+              <a:rPr sz="1800" b="0">
+                <a:solidFill>
+                  <a:srgbClr val="A02B93"/>
+                </a:solidFill>
+                <a:latin typeface="Microsoft YaHei"/>
+                <a:ea typeface="Microsoft YaHei"/>
+                <a:cs typeface="Microsoft YaHei"/>
+              </a:rPr>
+              <a:t>west</a:t>
+            </a:r>
+            <a:r>
+              <a:rPr sz="1800" b="0">
+                <a:solidFill>
+                  <a:srgbClr val="29263B"/>
+                </a:solidFill>
+                <a:latin typeface="Microsoft YaHei"/>
+                <a:ea typeface="Microsoft YaHei"/>
+                <a:cs typeface="Microsoft YaHei"/>
+              </a:rPr>
+              <a:t> 1.5.0。</a:t>
             </a:r>
           </a:p>
           <a:p>
@@ -37559,7 +39336,51 @@
                 <a:ea typeface="Microsoft YaHei"/>
                 <a:cs typeface="Microsoft YaHei"/>
               </a:rPr>
-              <a:t>找不到 west 时回 P002 检查 venv，不新建或删除 .west。</a:t>
+              <a:t>找不到 </a:t>
+            </a:r>
+            <a:r>
+              <a:rPr sz="1800" b="0">
+                <a:solidFill>
+                  <a:srgbClr val="A02B93"/>
+                </a:solidFill>
+                <a:latin typeface="Microsoft YaHei"/>
+                <a:ea typeface="Microsoft YaHei"/>
+                <a:cs typeface="Microsoft YaHei"/>
+              </a:rPr>
+              <a:t>west</a:t>
+            </a:r>
+            <a:r>
+              <a:rPr sz="1800" b="0">
+                <a:solidFill>
+                  <a:srgbClr val="29263B"/>
+                </a:solidFill>
+                <a:latin typeface="Microsoft YaHei"/>
+                <a:ea typeface="Microsoft YaHei"/>
+                <a:cs typeface="Microsoft YaHei"/>
+              </a:rPr>
+              <a:t> 时回 P002 检查 venv，不新建或删除 </a:t>
+            </a:r>
+            <a:r>
+              <a:rPr sz="1800" b="0">
+                <a:solidFill>
+                  <a:srgbClr val="0070C0"/>
+                </a:solidFill>
+                <a:latin typeface="Microsoft YaHei"/>
+                <a:ea typeface="Microsoft YaHei"/>
+                <a:cs typeface="Microsoft YaHei"/>
+              </a:rPr>
+              <a:t>.west</a:t>
+            </a:r>
+            <a:r>
+              <a:rPr sz="1800" b="0">
+                <a:solidFill>
+                  <a:srgbClr val="29263B"/>
+                </a:solidFill>
+                <a:latin typeface="Microsoft YaHei"/>
+                <a:ea typeface="Microsoft YaHei"/>
+                <a:cs typeface="Microsoft YaHei"/>
+              </a:rPr>
+              <a:t>。</a:t>
             </a:r>
           </a:p>
         </p:txBody>
@@ -37629,7 +39450,16 @@
               <a:rPr u="sng">
                 <a:hlinkClick r:id="R45ddd308b4c7451b"/>
               </a:rPr>
-              <a:t>依据：doc/develop/west/basics.rst</a:t>
+              <a:t>依据：</a:t>
+            </a:r>
+            <a:r>
+              <a:rPr u="sng">
+                <a:solidFill>
+                  <a:srgbClr val="0070C0"/>
+                </a:solidFill>
+                <a:hlinkClick r:id="R45ddd308b4c7451b"/>
+              </a:rPr>
+              <a:t>doc/develop/west/basics.rst</a:t>
             </a:r>
           </a:p>
         </p:txBody>
@@ -38102,13 +39932,46 @@
             <a:r>
               <a:rPr sz="1950" b="0">
                 <a:solidFill>
-                  <a:srgbClr val="29263B"/>
-                </a:solidFill>
-                <a:latin typeface="Microsoft YaHei"/>
-                <a:ea typeface="Microsoft YaHei"/>
-                <a:cs typeface="Microsoft YaHei"/>
-              </a:rPr>
-              <a:t>G:/zephyr_practice 是工作区根，.west/config 标记并配置它。</a:t>
+                  <a:srgbClr val="0070C0"/>
+                </a:solidFill>
+                <a:latin typeface="Microsoft YaHei"/>
+                <a:ea typeface="Microsoft YaHei"/>
+                <a:cs typeface="Microsoft YaHei"/>
+              </a:rPr>
+              <a:t>G:/zephyr_practice</a:t>
+            </a:r>
+            <a:r>
+              <a:rPr sz="1950" b="0">
+                <a:solidFill>
+                  <a:srgbClr val="29263B"/>
+                </a:solidFill>
+                <a:latin typeface="Microsoft YaHei"/>
+                <a:ea typeface="Microsoft YaHei"/>
+                <a:cs typeface="Microsoft YaHei"/>
+              </a:rPr>
+              <a:t> 是工作区根，</a:t>
+            </a:r>
+            <a:r>
+              <a:rPr sz="1950" b="0">
+                <a:solidFill>
+                  <a:srgbClr val="0070C0"/>
+                </a:solidFill>
+                <a:latin typeface="Microsoft YaHei"/>
+                <a:ea typeface="Microsoft YaHei"/>
+                <a:cs typeface="Microsoft YaHei"/>
+              </a:rPr>
+              <a:t>.west/config</a:t>
+            </a:r>
+            <a:r>
+              <a:rPr sz="1950" b="0">
+                <a:solidFill>
+                  <a:srgbClr val="29263B"/>
+                </a:solidFill>
+                <a:latin typeface="Microsoft YaHei"/>
+                <a:ea typeface="Microsoft YaHei"/>
+                <a:cs typeface="Microsoft YaHei"/>
+              </a:rPr>
+              <a:t> 标记并配置它。</a:t>
             </a:r>
           </a:p>
           <a:p>
@@ -38138,7 +40001,29 @@
                 <a:ea typeface="Microsoft YaHei"/>
                 <a:cs typeface="Microsoft YaHei"/>
               </a:rPr>
-              <a:t>zephyr-main 放官方源码与清单；.venv 是 Python 环境。</a:t>
+              <a:t>zephyr-main 放官方源码与清单；</a:t>
+            </a:r>
+            <a:r>
+              <a:rPr sz="1950" b="0">
+                <a:solidFill>
+                  <a:srgbClr val="0070C0"/>
+                </a:solidFill>
+                <a:latin typeface="Microsoft YaHei"/>
+                <a:ea typeface="Microsoft YaHei"/>
+                <a:cs typeface="Microsoft YaHei"/>
+              </a:rPr>
+              <a:t>.venv</a:t>
+            </a:r>
+            <a:r>
+              <a:rPr sz="1950" b="0">
+                <a:solidFill>
+                  <a:srgbClr val="29263B"/>
+                </a:solidFill>
+                <a:latin typeface="Microsoft YaHei"/>
+                <a:ea typeface="Microsoft YaHei"/>
+                <a:cs typeface="Microsoft YaHei"/>
+              </a:rPr>
+              <a:t> 是 Python 环境。</a:t>
             </a:r>
           </a:p>
           <a:p>
@@ -38162,13 +40047,24 @@
             <a:r>
               <a:rPr sz="1950" b="0">
                 <a:solidFill>
-                  <a:srgbClr val="29263B"/>
-                </a:solidFill>
-                <a:latin typeface="Microsoft YaHei"/>
-                <a:ea typeface="Microsoft YaHei"/>
-                <a:cs typeface="Microsoft YaHei"/>
-              </a:rPr>
-              <a:t>modules/hal/cmsis_6 在工作区根下，由 update 下载。</a:t>
+                  <a:srgbClr val="0070C0"/>
+                </a:solidFill>
+                <a:latin typeface="Microsoft YaHei"/>
+                <a:ea typeface="Microsoft YaHei"/>
+                <a:cs typeface="Microsoft YaHei"/>
+              </a:rPr>
+              <a:t>modules/hal/cmsis_6</a:t>
+            </a:r>
+            <a:r>
+              <a:rPr sz="1950" b="0">
+                <a:solidFill>
+                  <a:srgbClr val="29263B"/>
+                </a:solidFill>
+                <a:latin typeface="Microsoft YaHei"/>
+                <a:ea typeface="Microsoft YaHei"/>
+                <a:cs typeface="Microsoft YaHei"/>
+              </a:rPr>
+              <a:t> 在工作区根下，由 update 下载。</a:t>
             </a:r>
           </a:p>
           <a:p>
@@ -38266,7 +40162,7 @@
             <a:r>
               <a:rPr sz="1725">
                 <a:solidFill>
-                  <a:srgbClr val="29263B"/>
+                  <a:srgbClr val="0070C0"/>
                 </a:solidFill>
                 <a:latin typeface="Microsoft YaHei"/>
                 <a:ea typeface="Microsoft YaHei"/>
@@ -38415,7 +40311,7 @@
             <a:r>
               <a:rPr sz="1725">
                 <a:solidFill>
-                  <a:srgbClr val="29263B"/>
+                  <a:srgbClr val="0070C0"/>
                 </a:solidFill>
                 <a:latin typeface="Microsoft YaHei"/>
                 <a:ea typeface="Microsoft YaHei"/>
@@ -38564,7 +40460,7 @@
             <a:r>
               <a:rPr sz="1725">
                 <a:solidFill>
-                  <a:srgbClr val="29263B"/>
+                  <a:srgbClr val="0070C0"/>
                 </a:solidFill>
                 <a:latin typeface="Microsoft YaHei"/>
                 <a:ea typeface="Microsoft YaHei"/>
@@ -38640,7 +40536,16 @@
               <a:rPr u="sng">
                 <a:hlinkClick r:id="Rb83716599f184209"/>
               </a:rPr>
-              <a:t>依据：doc/develop/west/workspaces.rst</a:t>
+              <a:t>依据：</a:t>
+            </a:r>
+            <a:r>
+              <a:rPr u="sng">
+                <a:solidFill>
+                  <a:srgbClr val="0070C0"/>
+                </a:solidFill>
+                <a:hlinkClick r:id="Rb83716599f184209"/>
+              </a:rPr>
+              <a:t>doc/develop/west/workspaces.rst</a:t>
             </a:r>
           </a:p>
         </p:txBody>
@@ -39043,13 +40948,90 @@
             <a:r>
               <a:rPr sz="1950" b="0">
                 <a:solidFill>
-                  <a:srgbClr val="29263B"/>
-                </a:solidFill>
-                <a:latin typeface="Microsoft YaHei"/>
-                <a:ea typeface="Microsoft YaHei"/>
-                <a:cs typeface="Microsoft YaHei"/>
-              </a:rPr>
-              <a:t>west 向上定位 .west，读取 config 的 manifest.path / manifest.file。</a:t>
+                  <a:srgbClr val="A02B93"/>
+                </a:solidFill>
+                <a:latin typeface="Microsoft YaHei"/>
+                <a:ea typeface="Microsoft YaHei"/>
+                <a:cs typeface="Microsoft YaHei"/>
+              </a:rPr>
+              <a:t>west</a:t>
+            </a:r>
+            <a:r>
+              <a:rPr sz="1950" b="0">
+                <a:solidFill>
+                  <a:srgbClr val="29263B"/>
+                </a:solidFill>
+                <a:latin typeface="Microsoft YaHei"/>
+                <a:ea typeface="Microsoft YaHei"/>
+                <a:cs typeface="Microsoft YaHei"/>
+              </a:rPr>
+              <a:t> 向上定位 </a:t>
+            </a:r>
+            <a:r>
+              <a:rPr sz="1950" b="0">
+                <a:solidFill>
+                  <a:srgbClr val="0070C0"/>
+                </a:solidFill>
+                <a:latin typeface="Microsoft YaHei"/>
+                <a:ea typeface="Microsoft YaHei"/>
+                <a:cs typeface="Microsoft YaHei"/>
+              </a:rPr>
+              <a:t>.west</a:t>
+            </a:r>
+            <a:r>
+              <a:rPr sz="1950" b="0">
+                <a:solidFill>
+                  <a:srgbClr val="29263B"/>
+                </a:solidFill>
+                <a:latin typeface="Microsoft YaHei"/>
+                <a:ea typeface="Microsoft YaHei"/>
+                <a:cs typeface="Microsoft YaHei"/>
+              </a:rPr>
+              <a:t>，读取 config 的 </a:t>
+            </a:r>
+            <a:r>
+              <a:rPr sz="1950" b="0">
+                <a:solidFill>
+                  <a:srgbClr val="B84E00"/>
+                </a:solidFill>
+                <a:latin typeface="Microsoft YaHei"/>
+                <a:ea typeface="Microsoft YaHei"/>
+                <a:cs typeface="Microsoft YaHei"/>
+              </a:rPr>
+              <a:t>manifest.path</a:t>
+            </a:r>
+            <a:r>
+              <a:rPr sz="1950" b="0">
+                <a:solidFill>
+                  <a:srgbClr val="29263B"/>
+                </a:solidFill>
+                <a:latin typeface="Microsoft YaHei"/>
+                <a:ea typeface="Microsoft YaHei"/>
+                <a:cs typeface="Microsoft YaHei"/>
+              </a:rPr>
+              <a:t> / </a:t>
+            </a:r>
+            <a:r>
+              <a:rPr sz="1950" b="0">
+                <a:solidFill>
+                  <a:srgbClr val="B84E00"/>
+                </a:solidFill>
+                <a:latin typeface="Microsoft YaHei"/>
+                <a:ea typeface="Microsoft YaHei"/>
+                <a:cs typeface="Microsoft YaHei"/>
+              </a:rPr>
+              <a:t>manifest.file</a:t>
+            </a:r>
+            <a:r>
+              <a:rPr sz="1950" b="0">
+                <a:solidFill>
+                  <a:srgbClr val="29263B"/>
+                </a:solidFill>
+                <a:latin typeface="Microsoft YaHei"/>
+                <a:ea typeface="Microsoft YaHei"/>
+                <a:cs typeface="Microsoft YaHei"/>
+              </a:rPr>
+              <a:t>。</a:t>
             </a:r>
           </a:p>
           <a:p>
@@ -39079,7 +41061,29 @@
                 <a:ea typeface="Microsoft YaHei"/>
                 <a:cs typeface="Microsoft YaHei"/>
               </a:rPr>
-              <a:t>本次组合成 zephyr-main/west.yml。</a:t>
+              <a:t>本次组合成 </a:t>
+            </a:r>
+            <a:r>
+              <a:rPr sz="1950" b="0">
+                <a:solidFill>
+                  <a:srgbClr val="0070C0"/>
+                </a:solidFill>
+                <a:latin typeface="Microsoft YaHei"/>
+                <a:ea typeface="Microsoft YaHei"/>
+                <a:cs typeface="Microsoft YaHei"/>
+              </a:rPr>
+              <a:t>zephyr-main/west.yml</a:t>
+            </a:r>
+            <a:r>
+              <a:rPr sz="1950" b="0">
+                <a:solidFill>
+                  <a:srgbClr val="29263B"/>
+                </a:solidFill>
+                <a:latin typeface="Microsoft YaHei"/>
+                <a:ea typeface="Microsoft YaHei"/>
+                <a:cs typeface="Microsoft YaHei"/>
+              </a:rPr>
+              <a:t>。</a:t>
             </a:r>
           </a:p>
           <a:p>
@@ -39332,7 +41336,18 @@
                 <a:ea typeface="Microsoft YaHei"/>
                 <a:cs typeface="Microsoft YaHei"/>
               </a:rPr>
-              <a:t>向上找 .west</a:t>
+              <a:t>向上找 </a:t>
+            </a:r>
+            <a:r>
+              <a:rPr sz="1725">
+                <a:solidFill>
+                  <a:srgbClr val="0070C0"/>
+                </a:solidFill>
+                <a:latin typeface="Microsoft YaHei"/>
+                <a:ea typeface="Microsoft YaHei"/>
+                <a:cs typeface="Microsoft YaHei"/>
+              </a:rPr>
+              <a:t>.west</a:t>
             </a:r>
           </a:p>
         </p:txBody>
@@ -39700,7 +41715,16 @@
               <a:rPr u="sng">
                 <a:hlinkClick r:id="Rd8a4ca25c17e4227"/>
               </a:rPr>
-              <a:t>依据：doc/develop/west/workspaces.rst</a:t>
+              <a:t>依据：</a:t>
+            </a:r>
+            <a:r>
+              <a:rPr u="sng">
+                <a:solidFill>
+                  <a:srgbClr val="0070C0"/>
+                </a:solidFill>
+                <a:hlinkClick r:id="Rd8a4ca25c17e4227"/>
+              </a:rPr>
+              <a:t>doc/develop/west/workspaces.rst</a:t>
             </a:r>
           </a:p>
         </p:txBody>
@@ -40103,7 +42127,7 @@
             <a:r>
               <a:rPr sz="1725" b="0">
                 <a:solidFill>
-                  <a:srgbClr val="29263B"/>
+                  <a:srgbClr val="646173"/>
                 </a:solidFill>
                 <a:latin typeface="Consolas"/>
                 <a:ea typeface="Consolas"/>
@@ -40193,129 +42217,162 @@
                 <a:ea typeface="Consolas"/>
                 <a:cs typeface="Consolas"/>
               </a:rPr>
-              <a:t> .venv</a:t>
-            </a:r>
-            <a:r>
-              <a:rPr>
+              <a:t> </a:t>
+            </a:r>
+            <a:r>
+              <a:rPr sz="1725" b="0">
                 <a:solidFill>
                   <a:srgbClr val="0070C0"/>
-                </a:solidFill>
-              </a:rPr>
-              <a:t>/Scripts/activate</a:t>
-            </a:r>
-          </a:p>
-          <a:p>
-            <a:pPr>
-              <a:lnSpc>
-                <a:spcPct val="120000"/>
-              </a:lnSpc>
-              <a:spcAft>
-                <a:spcPts val="0"/>
-              </a:spcAft>
-              <a:buNone/>
-              <a:defRPr sz="1725" b="0">
-                <a:solidFill>
-                  <a:srgbClr val="29263B"/>
                 </a:solidFill>
                 <a:latin typeface="Consolas"/>
                 <a:ea typeface="Consolas"/>
                 <a:cs typeface="Consolas"/>
-              </a:defRPr>
-            </a:pPr>
+              </a:rPr>
+              <a:t>.venv</a:t>
+            </a:r>
             <a:r>
               <a:rPr>
                 <a:solidFill>
-                  <a:srgbClr val="A02B93"/>
-                </a:solidFill>
-              </a:rPr>
-              <a:t>west</a:t>
-            </a:r>
-            <a:r>
-              <a:rPr sz="1725" b="0">
+                  <a:srgbClr val="0070C0"/>
+                </a:solidFill>
+              </a:rPr>
+              <a:t>/Scripts/activate</a:t>
+            </a:r>
+          </a:p>
+          <a:p>
+            <a:pPr>
+              <a:lnSpc>
+                <a:spcPct val="120000"/>
+              </a:lnSpc>
+              <a:spcAft>
+                <a:spcPts val="0"/>
+              </a:spcAft>
+              <a:buNone/>
+              <a:defRPr sz="1725" b="0">
                 <a:solidFill>
                   <a:srgbClr val="29263B"/>
                 </a:solidFill>
                 <a:latin typeface="Consolas"/>
                 <a:ea typeface="Consolas"/>
                 <a:cs typeface="Consolas"/>
-              </a:rPr>
-              <a:t> topdir</a:t>
-            </a:r>
-          </a:p>
-          <a:p>
-            <a:pPr>
-              <a:lnSpc>
-                <a:spcPct val="120000"/>
-              </a:lnSpc>
-              <a:spcAft>
-                <a:spcPts val="0"/>
-              </a:spcAft>
-              <a:buNone/>
-              <a:defRPr sz="1725" b="0">
+              </a:defRPr>
+            </a:pPr>
+            <a:r>
+              <a:rPr>
+                <a:solidFill>
+                  <a:srgbClr val="A02B93"/>
+                </a:solidFill>
+              </a:rPr>
+              <a:t>west</a:t>
+            </a:r>
+            <a:r>
+              <a:rPr sz="1725" b="0">
                 <a:solidFill>
                   <a:srgbClr val="29263B"/>
                 </a:solidFill>
                 <a:latin typeface="Consolas"/>
                 <a:ea typeface="Consolas"/>
                 <a:cs typeface="Consolas"/>
-              </a:defRPr>
-            </a:pPr>
-            <a:r>
-              <a:rPr>
-                <a:solidFill>
-                  <a:srgbClr val="A02B93"/>
-                </a:solidFill>
-              </a:rPr>
-              <a:t>west</a:t>
-            </a:r>
-            <a:r>
-              <a:rPr sz="1725" b="0">
+              </a:rPr>
+              <a:t> topdir</a:t>
+            </a:r>
+          </a:p>
+          <a:p>
+            <a:pPr>
+              <a:lnSpc>
+                <a:spcPct val="120000"/>
+              </a:lnSpc>
+              <a:spcAft>
+                <a:spcPts val="0"/>
+              </a:spcAft>
+              <a:buNone/>
+              <a:defRPr sz="1725" b="0">
                 <a:solidFill>
                   <a:srgbClr val="29263B"/>
                 </a:solidFill>
                 <a:latin typeface="Consolas"/>
                 <a:ea typeface="Consolas"/>
                 <a:cs typeface="Consolas"/>
-              </a:rPr>
-              <a:t> config manifest.path</a:t>
-            </a:r>
-          </a:p>
-          <a:p>
-            <a:pPr>
-              <a:lnSpc>
-                <a:spcPct val="120000"/>
-              </a:lnSpc>
-              <a:spcAft>
-                <a:spcPts val="0"/>
-              </a:spcAft>
-              <a:buNone/>
-              <a:defRPr sz="1725" b="0">
+              </a:defRPr>
+            </a:pPr>
+            <a:r>
+              <a:rPr>
+                <a:solidFill>
+                  <a:srgbClr val="A02B93"/>
+                </a:solidFill>
+              </a:rPr>
+              <a:t>west</a:t>
+            </a:r>
+            <a:r>
+              <a:rPr sz="1725" b="0">
                 <a:solidFill>
                   <a:srgbClr val="29263B"/>
                 </a:solidFill>
                 <a:latin typeface="Consolas"/>
                 <a:ea typeface="Consolas"/>
                 <a:cs typeface="Consolas"/>
-              </a:defRPr>
-            </a:pPr>
-            <a:r>
-              <a:rPr>
-                <a:solidFill>
-                  <a:srgbClr val="A02B93"/>
-                </a:solidFill>
-              </a:rPr>
-              <a:t>west</a:t>
+              </a:rPr>
+              <a:t> config </a:t>
             </a:r>
             <a:r>
               <a:rPr sz="1725" b="0">
                 <a:solidFill>
-                  <a:srgbClr val="29263B"/>
+                  <a:srgbClr val="B84E00"/>
                 </a:solidFill>
                 <a:latin typeface="Consolas"/>
                 <a:ea typeface="Consolas"/>
                 <a:cs typeface="Consolas"/>
               </a:rPr>
-              <a:t> config manifest.file</a:t>
+              <a:t>manifest.path</a:t>
+            </a:r>
+          </a:p>
+          <a:p>
+            <a:pPr>
+              <a:lnSpc>
+                <a:spcPct val="120000"/>
+              </a:lnSpc>
+              <a:spcAft>
+                <a:spcPts val="0"/>
+              </a:spcAft>
+              <a:buNone/>
+              <a:defRPr sz="1725" b="0">
+                <a:solidFill>
+                  <a:srgbClr val="29263B"/>
+                </a:solidFill>
+                <a:latin typeface="Consolas"/>
+                <a:ea typeface="Consolas"/>
+                <a:cs typeface="Consolas"/>
+              </a:defRPr>
+            </a:pPr>
+            <a:r>
+              <a:rPr>
+                <a:solidFill>
+                  <a:srgbClr val="A02B93"/>
+                </a:solidFill>
+              </a:rPr>
+              <a:t>west</a:t>
+            </a:r>
+            <a:r>
+              <a:rPr sz="1725" b="0">
+                <a:solidFill>
+                  <a:srgbClr val="29263B"/>
+                </a:solidFill>
+                <a:latin typeface="Consolas"/>
+                <a:ea typeface="Consolas"/>
+                <a:cs typeface="Consolas"/>
+              </a:rPr>
+              <a:t> config </a:t>
+            </a:r>
+            <a:r>
+              <a:rPr sz="1725" b="0">
+                <a:solidFill>
+                  <a:srgbClr val="B84E00"/>
+                </a:solidFill>
+                <a:latin typeface="Consolas"/>
+                <a:ea typeface="Consolas"/>
+                <a:cs typeface="Consolas"/>
+              </a:rPr>
+              <a:t>manifest.file</a:t>
             </a:r>
           </a:p>
         </p:txBody>
@@ -40390,7 +42447,51 @@
                 <a:ea typeface="Microsoft YaHei"/>
                 <a:cs typeface="Microsoft YaHei"/>
               </a:rPr>
-              <a:t>本次预期：G:/zephyr_practice、zephyr-main、west.yml。</a:t>
+              <a:t>本次预期：</a:t>
+            </a:r>
+            <a:r>
+              <a:rPr sz="1800" b="0">
+                <a:solidFill>
+                  <a:srgbClr val="0070C0"/>
+                </a:solidFill>
+                <a:latin typeface="Microsoft YaHei"/>
+                <a:ea typeface="Microsoft YaHei"/>
+                <a:cs typeface="Microsoft YaHei"/>
+              </a:rPr>
+              <a:t>G:/zephyr_practice</a:t>
+            </a:r>
+            <a:r>
+              <a:rPr sz="1800" b="0">
+                <a:solidFill>
+                  <a:srgbClr val="29263B"/>
+                </a:solidFill>
+                <a:latin typeface="Microsoft YaHei"/>
+                <a:ea typeface="Microsoft YaHei"/>
+                <a:cs typeface="Microsoft YaHei"/>
+              </a:rPr>
+              <a:t>、zephyr-main、</a:t>
+            </a:r>
+            <a:r>
+              <a:rPr sz="1800" b="0">
+                <a:solidFill>
+                  <a:srgbClr val="0070C0"/>
+                </a:solidFill>
+                <a:latin typeface="Microsoft YaHei"/>
+                <a:ea typeface="Microsoft YaHei"/>
+                <a:cs typeface="Microsoft YaHei"/>
+              </a:rPr>
+              <a:t>west.yml</a:t>
+            </a:r>
+            <a:r>
+              <a:rPr sz="1800" b="0">
+                <a:solidFill>
+                  <a:srgbClr val="29263B"/>
+                </a:solidFill>
+                <a:latin typeface="Microsoft YaHei"/>
+                <a:ea typeface="Microsoft YaHei"/>
+                <a:cs typeface="Microsoft YaHei"/>
+              </a:rPr>
+              <a:t>。</a:t>
             </a:r>
           </a:p>
           <a:p>
@@ -40420,7 +42521,29 @@
                 <a:ea typeface="Microsoft YaHei"/>
                 <a:cs typeface="Microsoft YaHei"/>
               </a:rPr>
-              <a:t>already initialized 说明已有工作区；核对位置，不删除 .west。</a:t>
+              <a:t>already initialized 说明已有工作区；核对位置，不删除 </a:t>
+            </a:r>
+            <a:r>
+              <a:rPr sz="1800" b="0">
+                <a:solidFill>
+                  <a:srgbClr val="0070C0"/>
+                </a:solidFill>
+                <a:latin typeface="Microsoft YaHei"/>
+                <a:ea typeface="Microsoft YaHei"/>
+                <a:cs typeface="Microsoft YaHei"/>
+              </a:rPr>
+              <a:t>.west</a:t>
+            </a:r>
+            <a:r>
+              <a:rPr sz="1800" b="0">
+                <a:solidFill>
+                  <a:srgbClr val="29263B"/>
+                </a:solidFill>
+                <a:latin typeface="Microsoft YaHei"/>
+                <a:ea typeface="Microsoft YaHei"/>
+                <a:cs typeface="Microsoft YaHei"/>
+              </a:rPr>
+              <a:t>。</a:t>
             </a:r>
           </a:p>
         </p:txBody>
@@ -40490,7 +42613,16 @@
               <a:rPr u="sng">
                 <a:hlinkClick r:id="R059108a9fa724a64"/>
               </a:rPr>
-              <a:t>依据：doc/develop/west/workspaces.rst</a:t>
+              <a:t>依据：</a:t>
+            </a:r>
+            <a:r>
+              <a:rPr u="sng">
+                <a:solidFill>
+                  <a:srgbClr val="0070C0"/>
+                </a:solidFill>
+                <a:hlinkClick r:id="R059108a9fa724a64"/>
+              </a:rPr>
+              <a:t>doc/develop/west/workspaces.rst</a:t>
             </a:r>
           </a:p>
         </p:txBody>
@@ -40963,7 +43095,7 @@
             <a:r>
               <a:rPr sz="1725" b="0">
                 <a:solidFill>
-                  <a:srgbClr val="29263B"/>
+                  <a:srgbClr val="646173"/>
                 </a:solidFill>
                 <a:latin typeface="Consolas"/>
                 <a:ea typeface="Consolas"/>
@@ -41053,61 +43185,53 @@
                 <a:ea typeface="Consolas"/>
                 <a:cs typeface="Consolas"/>
               </a:rPr>
-              <a:t> .venv</a:t>
-            </a:r>
-            <a:r>
-              <a:rPr>
+              <a:t> </a:t>
+            </a:r>
+            <a:r>
+              <a:rPr sz="1725" b="0">
                 <a:solidFill>
                   <a:srgbClr val="0070C0"/>
-                </a:solidFill>
-              </a:rPr>
-              <a:t>/Scripts/activate</a:t>
-            </a:r>
-          </a:p>
-          <a:p>
-            <a:pPr>
-              <a:lnSpc>
-                <a:spcPct val="120000"/>
-              </a:lnSpc>
-              <a:spcAft>
-                <a:spcPts val="0"/>
-              </a:spcAft>
-              <a:buNone/>
-              <a:defRPr sz="1725" b="0">
-                <a:solidFill>
-                  <a:srgbClr val="29263B"/>
                 </a:solidFill>
                 <a:latin typeface="Consolas"/>
                 <a:ea typeface="Consolas"/>
                 <a:cs typeface="Consolas"/>
-              </a:defRPr>
-            </a:pPr>
+              </a:rPr>
+              <a:t>.venv</a:t>
+            </a:r>
             <a:r>
               <a:rPr>
                 <a:solidFill>
-                  <a:srgbClr val="A02B93"/>
-                </a:solidFill>
-              </a:rPr>
-              <a:t>test</a:t>
-            </a:r>
-            <a:r>
-              <a:rPr sz="1725" b="0">
+                  <a:srgbClr val="0070C0"/>
+                </a:solidFill>
+              </a:rPr>
+              <a:t>/Scripts/activate</a:t>
+            </a:r>
+          </a:p>
+          <a:p>
+            <a:pPr>
+              <a:lnSpc>
+                <a:spcPct val="120000"/>
+              </a:lnSpc>
+              <a:spcAft>
+                <a:spcPts val="0"/>
+              </a:spcAft>
+              <a:buNone/>
+              <a:defRPr sz="1725" b="0">
                 <a:solidFill>
                   <a:srgbClr val="29263B"/>
                 </a:solidFill>
                 <a:latin typeface="Consolas"/>
                 <a:ea typeface="Consolas"/>
                 <a:cs typeface="Consolas"/>
-              </a:rPr>
-              <a:t> -f </a:t>
-            </a:r>
+              </a:defRPr>
+            </a:pPr>
             <a:r>
               <a:rPr>
                 <a:solidFill>
                   <a:srgbClr val="A02B93"/>
                 </a:solidFill>
               </a:rPr>
-              <a:t>west</a:t>
+              <a:t>test</a:t>
             </a:r>
             <a:r>
               <a:rPr sz="1725" b="0">
@@ -41118,64 +43242,48 @@
                 <a:ea typeface="Consolas"/>
                 <a:cs typeface="Consolas"/>
               </a:rPr>
-              <a:t>.yml &amp;&amp; </a:t>
-            </a:r>
-            <a:r>
-              <a:rPr>
-                <a:solidFill>
-                  <a:srgbClr val="A02B93"/>
-                </a:solidFill>
-              </a:rPr>
-              <a:t>west</a:t>
+              <a:t> </a:t>
             </a:r>
             <a:r>
               <a:rPr sz="1725" b="0">
                 <a:solidFill>
-                  <a:srgbClr val="29263B"/>
+                  <a:srgbClr val="B84E00"/>
                 </a:solidFill>
                 <a:latin typeface="Consolas"/>
                 <a:ea typeface="Consolas"/>
                 <a:cs typeface="Consolas"/>
               </a:rPr>
-              <a:t> init -l . &amp;&amp;</a:t>
-            </a:r>
-          </a:p>
-          <a:p>
-            <a:pPr>
-              <a:lnSpc>
-                <a:spcPct val="120000"/>
-              </a:lnSpc>
-              <a:spcAft>
-                <a:spcPts val="0"/>
-              </a:spcAft>
-              <a:buNone/>
-              <a:defRPr sz="1725" b="0">
+              <a:t>-f</a:t>
+            </a:r>
+            <a:r>
+              <a:rPr sz="1725" b="0">
                 <a:solidFill>
                   <a:srgbClr val="29263B"/>
                 </a:solidFill>
                 <a:latin typeface="Consolas"/>
                 <a:ea typeface="Consolas"/>
                 <a:cs typeface="Consolas"/>
-              </a:defRPr>
-            </a:pPr>
+              </a:rPr>
+              <a:t> </a:t>
+            </a:r>
+            <a:r>
+              <a:rPr>
+                <a:solidFill>
+                  <a:srgbClr val="0070C0"/>
+                </a:solidFill>
+              </a:rPr>
+              <a:t>west</a:t>
+            </a:r>
             <a:r>
               <a:rPr sz="1725" b="0">
                 <a:solidFill>
-                  <a:srgbClr val="29263B"/>
+                  <a:srgbClr val="0070C0"/>
                 </a:solidFill>
                 <a:latin typeface="Consolas"/>
                 <a:ea typeface="Consolas"/>
                 <a:cs typeface="Consolas"/>
               </a:rPr>
-              <a:t>  </a:t>
-            </a:r>
-            <a:r>
-              <a:rPr>
-                <a:solidFill>
-                  <a:srgbClr val="A02B93"/>
-                </a:solidFill>
-              </a:rPr>
-              <a:t>west</a:t>
+              <a:t>.yml</a:t>
             </a:r>
             <a:r>
               <a:rPr sz="1725" b="0">
@@ -41186,7 +43294,7 @@
                 <a:ea typeface="Consolas"/>
                 <a:cs typeface="Consolas"/>
               </a:rPr>
-              <a:t> topdir &amp;&amp; </a:t>
+              <a:t> &amp;&amp; </a:t>
             </a:r>
             <a:r>
               <a:rPr>
@@ -41205,26 +43313,149 @@
                 <a:ea typeface="Consolas"/>
                 <a:cs typeface="Consolas"/>
               </a:rPr>
-              <a:t> config manifest.path &amp;&amp; </a:t>
-            </a:r>
-            <a:r>
-              <a:rPr>
-                <a:solidFill>
-                  <a:srgbClr val="A02B93"/>
-                </a:solidFill>
-              </a:rPr>
-              <a:t>west</a:t>
+              <a:t> init </a:t>
             </a:r>
             <a:r>
               <a:rPr sz="1725" b="0">
                 <a:solidFill>
-                  <a:srgbClr val="29263B"/>
+                  <a:srgbClr val="B84E00"/>
                 </a:solidFill>
                 <a:latin typeface="Consolas"/>
                 <a:ea typeface="Consolas"/>
                 <a:cs typeface="Consolas"/>
               </a:rPr>
-              <a:t> config manifest.file</a:t>
+              <a:t>-l</a:t>
+            </a:r>
+            <a:r>
+              <a:rPr sz="1725" b="0">
+                <a:solidFill>
+                  <a:srgbClr val="29263B"/>
+                </a:solidFill>
+                <a:latin typeface="Consolas"/>
+                <a:ea typeface="Consolas"/>
+                <a:cs typeface="Consolas"/>
+              </a:rPr>
+              <a:t> . &amp;&amp;</a:t>
+            </a:r>
+          </a:p>
+          <a:p>
+            <a:pPr>
+              <a:lnSpc>
+                <a:spcPct val="120000"/>
+              </a:lnSpc>
+              <a:spcAft>
+                <a:spcPts val="0"/>
+              </a:spcAft>
+              <a:buNone/>
+              <a:defRPr sz="1725" b="0">
+                <a:solidFill>
+                  <a:srgbClr val="29263B"/>
+                </a:solidFill>
+                <a:latin typeface="Consolas"/>
+                <a:ea typeface="Consolas"/>
+                <a:cs typeface="Consolas"/>
+              </a:defRPr>
+            </a:pPr>
+            <a:r>
+              <a:rPr sz="1725" b="0">
+                <a:solidFill>
+                  <a:srgbClr val="29263B"/>
+                </a:solidFill>
+                <a:latin typeface="Consolas"/>
+                <a:ea typeface="Consolas"/>
+                <a:cs typeface="Consolas"/>
+              </a:rPr>
+              <a:t>  </a:t>
+            </a:r>
+            <a:r>
+              <a:rPr>
+                <a:solidFill>
+                  <a:srgbClr val="A02B93"/>
+                </a:solidFill>
+              </a:rPr>
+              <a:t>west</a:t>
+            </a:r>
+            <a:r>
+              <a:rPr sz="1725" b="0">
+                <a:solidFill>
+                  <a:srgbClr val="29263B"/>
+                </a:solidFill>
+                <a:latin typeface="Consolas"/>
+                <a:ea typeface="Consolas"/>
+                <a:cs typeface="Consolas"/>
+              </a:rPr>
+              <a:t> topdir &amp;&amp; </a:t>
+            </a:r>
+            <a:r>
+              <a:rPr>
+                <a:solidFill>
+                  <a:srgbClr val="A02B93"/>
+                </a:solidFill>
+              </a:rPr>
+              <a:t>west</a:t>
+            </a:r>
+            <a:r>
+              <a:rPr sz="1725" b="0">
+                <a:solidFill>
+                  <a:srgbClr val="29263B"/>
+                </a:solidFill>
+                <a:latin typeface="Consolas"/>
+                <a:ea typeface="Consolas"/>
+                <a:cs typeface="Consolas"/>
+              </a:rPr>
+              <a:t> config </a:t>
+            </a:r>
+            <a:r>
+              <a:rPr sz="1725" b="0">
+                <a:solidFill>
+                  <a:srgbClr val="B84E00"/>
+                </a:solidFill>
+                <a:latin typeface="Consolas"/>
+                <a:ea typeface="Consolas"/>
+                <a:cs typeface="Consolas"/>
+              </a:rPr>
+              <a:t>manifest.path</a:t>
+            </a:r>
+            <a:r>
+              <a:rPr sz="1725" b="0">
+                <a:solidFill>
+                  <a:srgbClr val="29263B"/>
+                </a:solidFill>
+                <a:latin typeface="Consolas"/>
+                <a:ea typeface="Consolas"/>
+                <a:cs typeface="Consolas"/>
+              </a:rPr>
+              <a:t> &amp;&amp; </a:t>
+            </a:r>
+            <a:r>
+              <a:rPr>
+                <a:solidFill>
+                  <a:srgbClr val="A02B93"/>
+                </a:solidFill>
+              </a:rPr>
+              <a:t>west</a:t>
+            </a:r>
+            <a:r>
+              <a:rPr sz="1725" b="0">
+                <a:solidFill>
+                  <a:srgbClr val="29263B"/>
+                </a:solidFill>
+                <a:latin typeface="Consolas"/>
+                <a:ea typeface="Consolas"/>
+                <a:cs typeface="Consolas"/>
+              </a:rPr>
+              <a:t> config </a:t>
+            </a:r>
+            <a:r>
+              <a:rPr sz="1725" b="0">
+                <a:solidFill>
+                  <a:srgbClr val="B84E00"/>
+                </a:solidFill>
+                <a:latin typeface="Consolas"/>
+                <a:ea typeface="Consolas"/>
+                <a:cs typeface="Consolas"/>
+              </a:rPr>
+              <a:t>manifest.file</a:t>
             </a:r>
           </a:p>
         </p:txBody>
@@ -41293,13 +43524,46 @@
             <a:r>
               <a:rPr sz="1800" b="0">
                 <a:solidFill>
-                  <a:srgbClr val="29263B"/>
-                </a:solidFill>
-                <a:latin typeface="Microsoft YaHei"/>
-                <a:ea typeface="Microsoft YaHei"/>
-                <a:cs typeface="Microsoft YaHei"/>
-              </a:rPr>
-              <a:t>-l . 使用当前官方清单，生成父级 .west/config。</a:t>
+                  <a:srgbClr val="B84E00"/>
+                </a:solidFill>
+                <a:latin typeface="Microsoft YaHei"/>
+                <a:ea typeface="Microsoft YaHei"/>
+                <a:cs typeface="Microsoft YaHei"/>
+              </a:rPr>
+              <a:t>-l</a:t>
+            </a:r>
+            <a:r>
+              <a:rPr sz="1800" b="0">
+                <a:solidFill>
+                  <a:srgbClr val="29263B"/>
+                </a:solidFill>
+                <a:latin typeface="Microsoft YaHei"/>
+                <a:ea typeface="Microsoft YaHei"/>
+                <a:cs typeface="Microsoft YaHei"/>
+              </a:rPr>
+              <a:t> . 使用当前官方清单，生成父级 </a:t>
+            </a:r>
+            <a:r>
+              <a:rPr sz="1800" b="0">
+                <a:solidFill>
+                  <a:srgbClr val="0070C0"/>
+                </a:solidFill>
+                <a:latin typeface="Microsoft YaHei"/>
+                <a:ea typeface="Microsoft YaHei"/>
+                <a:cs typeface="Microsoft YaHei"/>
+              </a:rPr>
+              <a:t>.west/config</a:t>
+            </a:r>
+            <a:r>
+              <a:rPr sz="1800" b="0">
+                <a:solidFill>
+                  <a:srgbClr val="29263B"/>
+                </a:solidFill>
+                <a:latin typeface="Microsoft YaHei"/>
+                <a:ea typeface="Microsoft YaHei"/>
+                <a:cs typeface="Microsoft YaHei"/>
+              </a:rPr>
+              <a:t>。</a:t>
             </a:r>
           </a:p>
           <a:p>
@@ -41429,7 +43693,16 @@
               <a:rPr u="sng">
                 <a:hlinkClick r:id="R7f135e9cb5934813"/>
               </a:rPr>
-              <a:t>依据：doc/develop/west/workspaces.rst</a:t>
+              <a:t>依据：</a:t>
+            </a:r>
+            <a:r>
+              <a:rPr u="sng">
+                <a:solidFill>
+                  <a:srgbClr val="0070C0"/>
+                </a:solidFill>
+                <a:hlinkClick r:id="R7f135e9cb5934813"/>
+              </a:rPr>
+              <a:t>doc/develop/west/workspaces.rst</a:t>
             </a:r>
           </a:p>
         </p:txBody>
@@ -41968,7 +44241,29 @@
                 <a:ea typeface="Microsoft YaHei"/>
                 <a:cs typeface="Microsoft YaHei"/>
               </a:rPr>
-              <a:t>清单可导入其他清单，所以让 west 解析实际结果。</a:t>
+              <a:t>清单可导入其他清单，所以让 </a:t>
+            </a:r>
+            <a:r>
+              <a:rPr sz="1950" b="0">
+                <a:solidFill>
+                  <a:srgbClr val="A02B93"/>
+                </a:solidFill>
+                <a:latin typeface="Microsoft YaHei"/>
+                <a:ea typeface="Microsoft YaHei"/>
+                <a:cs typeface="Microsoft YaHei"/>
+              </a:rPr>
+              <a:t>west</a:t>
+            </a:r>
+            <a:r>
+              <a:rPr sz="1950" b="0">
+                <a:solidFill>
+                  <a:srgbClr val="29263B"/>
+                </a:solidFill>
+                <a:latin typeface="Microsoft YaHei"/>
+                <a:ea typeface="Microsoft YaHei"/>
+                <a:cs typeface="Microsoft YaHei"/>
+              </a:rPr>
+              <a:t> 解析实际结果。</a:t>
             </a:r>
           </a:p>
         </p:txBody>
@@ -42559,7 +44854,16 @@
               <a:rPr u="sng">
                 <a:hlinkClick r:id="R0d05332c27114ce0"/>
               </a:rPr>
-              <a:t>依据：doc/develop/west/built-in.rst</a:t>
+              <a:t>依据：</a:t>
+            </a:r>
+            <a:r>
+              <a:rPr u="sng">
+                <a:solidFill>
+                  <a:srgbClr val="0070C0"/>
+                </a:solidFill>
+                <a:hlinkClick r:id="R0d05332c27114ce0"/>
+              </a:rPr>
+              <a:t>doc/develop/west/built-in.rst</a:t>
             </a:r>
           </a:p>
         </p:txBody>
@@ -42962,7 +45266,7 @@
             <a:r>
               <a:rPr sz="1725" b="0">
                 <a:solidFill>
-                  <a:srgbClr val="29263B"/>
+                  <a:srgbClr val="646173"/>
                 </a:solidFill>
                 <a:latin typeface="Consolas"/>
                 <a:ea typeface="Consolas"/>
@@ -43052,83 +45356,116 @@
                 <a:ea typeface="Consolas"/>
                 <a:cs typeface="Consolas"/>
               </a:rPr>
-              <a:t> .venv</a:t>
-            </a:r>
-            <a:r>
-              <a:rPr>
+              <a:t> </a:t>
+            </a:r>
+            <a:r>
+              <a:rPr sz="1725" b="0">
                 <a:solidFill>
                   <a:srgbClr val="0070C0"/>
-                </a:solidFill>
-              </a:rPr>
-              <a:t>/Scripts/activate</a:t>
-            </a:r>
-          </a:p>
-          <a:p>
-            <a:pPr>
-              <a:lnSpc>
-                <a:spcPct val="120000"/>
-              </a:lnSpc>
-              <a:spcAft>
-                <a:spcPts val="0"/>
-              </a:spcAft>
-              <a:buNone/>
-              <a:defRPr sz="1725" b="0">
-                <a:solidFill>
-                  <a:srgbClr val="29263B"/>
                 </a:solidFill>
                 <a:latin typeface="Consolas"/>
                 <a:ea typeface="Consolas"/>
                 <a:cs typeface="Consolas"/>
-              </a:defRPr>
-            </a:pPr>
-            <a:r>
-              <a:rPr sz="1725" b="0">
+              </a:rPr>
+              <a:t>.venv</a:t>
+            </a:r>
+            <a:r>
+              <a:rPr>
+                <a:solidFill>
+                  <a:srgbClr val="0070C0"/>
+                </a:solidFill>
+              </a:rPr>
+              <a:t>/Scripts/activate</a:t>
+            </a:r>
+          </a:p>
+          <a:p>
+            <a:pPr>
+              <a:lnSpc>
+                <a:spcPct val="120000"/>
+              </a:lnSpc>
+              <a:spcAft>
+                <a:spcPts val="0"/>
+              </a:spcAft>
+              <a:buNone/>
+              <a:defRPr sz="1725" b="0">
                 <a:solidFill>
                   <a:srgbClr val="29263B"/>
                 </a:solidFill>
                 <a:latin typeface="Consolas"/>
                 <a:ea typeface="Consolas"/>
                 <a:cs typeface="Consolas"/>
-              </a:rPr>
-              <a:t># 只读解析结果，不下载、不修改清单。</a:t>
-            </a:r>
-          </a:p>
-          <a:p>
-            <a:pPr>
-              <a:lnSpc>
-                <a:spcPct val="120000"/>
-              </a:lnSpc>
-              <a:spcAft>
-                <a:spcPts val="0"/>
-              </a:spcAft>
-              <a:buNone/>
-              <a:defRPr sz="1725" b="0">
-                <a:solidFill>
-                  <a:srgbClr val="29263B"/>
+              </a:defRPr>
+            </a:pPr>
+            <a:r>
+              <a:rPr sz="1725" b="0">
+                <a:solidFill>
+                  <a:srgbClr val="646173"/>
                 </a:solidFill>
                 <a:latin typeface="Consolas"/>
                 <a:ea typeface="Consolas"/>
                 <a:cs typeface="Consolas"/>
-              </a:defRPr>
-            </a:pPr>
-            <a:r>
-              <a:rPr>
-                <a:solidFill>
-                  <a:srgbClr val="A02B93"/>
-                </a:solidFill>
-              </a:rPr>
-              <a:t>west</a:t>
-            </a:r>
-            <a:r>
-              <a:rPr sz="1725" b="0">
+              </a:rPr>
+              <a:t># 只读解析结果，不下载、不修改清单。</a:t>
+            </a:r>
+          </a:p>
+          <a:p>
+            <a:pPr>
+              <a:lnSpc>
+                <a:spcPct val="120000"/>
+              </a:lnSpc>
+              <a:spcAft>
+                <a:spcPts val="0"/>
+              </a:spcAft>
+              <a:buNone/>
+              <a:defRPr sz="1725" b="0">
                 <a:solidFill>
                   <a:srgbClr val="29263B"/>
                 </a:solidFill>
                 <a:latin typeface="Consolas"/>
                 <a:ea typeface="Consolas"/>
                 <a:cs typeface="Consolas"/>
-              </a:rPr>
-              <a:t> list cmsis_6 -f '{name} {url} {revision} {abspath}'</a:t>
+              </a:defRPr>
+            </a:pPr>
+            <a:r>
+              <a:rPr>
+                <a:solidFill>
+                  <a:srgbClr val="A02B93"/>
+                </a:solidFill>
+              </a:rPr>
+              <a:t>west</a:t>
+            </a:r>
+            <a:r>
+              <a:rPr sz="1725" b="0">
+                <a:solidFill>
+                  <a:srgbClr val="29263B"/>
+                </a:solidFill>
+                <a:latin typeface="Consolas"/>
+                <a:ea typeface="Consolas"/>
+                <a:cs typeface="Consolas"/>
+              </a:rPr>
+              <a:t> list cmsis_6 </a:t>
+            </a:r>
+            <a:r>
+              <a:rPr sz="1725" b="0">
+                <a:solidFill>
+                  <a:srgbClr val="B84E00"/>
+                </a:solidFill>
+                <a:latin typeface="Consolas"/>
+                <a:ea typeface="Consolas"/>
+                <a:cs typeface="Consolas"/>
+              </a:rPr>
+              <a:t>-f</a:t>
+            </a:r>
+            <a:r>
+              <a:rPr sz="1725" b="0">
+                <a:solidFill>
+                  <a:srgbClr val="29263B"/>
+                </a:solidFill>
+                <a:latin typeface="Consolas"/>
+                <a:ea typeface="Consolas"/>
+                <a:cs typeface="Consolas"/>
+              </a:rPr>
+              <a:t> '{name} {url} {revision} {abspath}'</a:t>
             </a:r>
           </a:p>
         </p:txBody>
@@ -43203,7 +45540,29 @@
                 <a:ea typeface="Microsoft YaHei"/>
                 <a:cs typeface="Microsoft YaHei"/>
               </a:rPr>
-              <a:t>预期 URL 指向 Zephyr 组织的 CMSIS_6，路径在工作区 modules/hal 下。</a:t>
+              <a:t>预期 URL 指向 Zephyr 组织的 CMSIS_6，路径在工作区 </a:t>
+            </a:r>
+            <a:r>
+              <a:rPr sz="1800" b="0">
+                <a:solidFill>
+                  <a:srgbClr val="0070C0"/>
+                </a:solidFill>
+                <a:latin typeface="Microsoft YaHei"/>
+                <a:ea typeface="Microsoft YaHei"/>
+                <a:cs typeface="Microsoft YaHei"/>
+              </a:rPr>
+              <a:t>modules/hal</a:t>
+            </a:r>
+            <a:r>
+              <a:rPr sz="1800" b="0">
+                <a:solidFill>
+                  <a:srgbClr val="29263B"/>
+                </a:solidFill>
+                <a:latin typeface="Microsoft YaHei"/>
+                <a:ea typeface="Microsoft YaHei"/>
+                <a:cs typeface="Microsoft YaHei"/>
+              </a:rPr>
+              <a:t> 下。</a:t>
             </a:r>
           </a:p>
           <a:p>
@@ -43303,7 +45662,16 @@
               <a:rPr u="sng">
                 <a:hlinkClick r:id="R68c43775ed504d94"/>
               </a:rPr>
-              <a:t>依据：doc/develop/west/built-in.rst</a:t>
+              <a:t>依据：</a:t>
+            </a:r>
+            <a:r>
+              <a:rPr u="sng">
+                <a:solidFill>
+                  <a:srgbClr val="0070C0"/>
+                </a:solidFill>
+                <a:hlinkClick r:id="R68c43775ed504d94"/>
+              </a:rPr>
+              <a:t>doc/develop/west/built-in.rst</a:t>
             </a:r>
           </a:p>
         </p:txBody>
